--- a/docs/presentation.pptx
+++ b/docs/presentation.pptx
@@ -2294,6 +2294,13 @@
           </a:solidFill>
           <a:ln/>
         </p:spPr>
+        <p:txBody>
+          <a:bodyPr/>
+          <a:lstStyle/>
+          <a:p>
+            <a:endParaRPr lang="en-US"/>
+          </a:p>
+        </p:txBody>
       </p:sp>
       <p:sp>
         <p:nvSpPr>
@@ -2316,6 +2323,13 @@
           </a:solidFill>
           <a:ln/>
         </p:spPr>
+        <p:txBody>
+          <a:bodyPr/>
+          <a:lstStyle/>
+          <a:p>
+            <a:endParaRPr lang="en-US"/>
+          </a:p>
+        </p:txBody>
       </p:sp>
       <p:sp>
         <p:nvSpPr>
@@ -2325,7 +2339,7 @@
         </p:nvSpPr>
         <p:spPr>
           <a:xfrm>
-            <a:off x="548640" y="1280160"/>
+            <a:off x="585216" y="384810"/>
             <a:ext cx="73152" cy="2011680"/>
           </a:xfrm>
           <a:prstGeom prst="rect">
@@ -2336,6 +2350,13 @@
           </a:solidFill>
           <a:ln/>
         </p:spPr>
+        <p:txBody>
+          <a:bodyPr/>
+          <a:lstStyle/>
+          <a:p>
+            <a:endParaRPr lang="en-US"/>
+          </a:p>
+        </p:txBody>
       </p:sp>
       <p:sp>
         <p:nvSpPr>
@@ -2345,7 +2366,7 @@
         </p:nvSpPr>
         <p:spPr>
           <a:xfrm>
-            <a:off x="914400" y="1188720"/>
+            <a:off x="914400" y="384810"/>
             <a:ext cx="7315200" cy="2194560"/>
           </a:xfrm>
           <a:prstGeom prst="rect">
@@ -2427,7 +2448,7 @@
         </p:nvSpPr>
         <p:spPr>
           <a:xfrm>
-            <a:off x="914400" y="3291840"/>
+            <a:off x="585216" y="2399030"/>
             <a:ext cx="7315200" cy="457200"/>
           </a:xfrm>
           <a:prstGeom prst="rect">
@@ -2572,6 +2593,440 @@
               <a:t>4/2026</a:t>
             </a:r>
             <a:endParaRPr lang="en-US" sz="1200" dirty="0"/>
+          </a:p>
+        </p:txBody>
+      </p:sp>
+      <p:sp>
+        <p:nvSpPr>
+          <p:cNvPr id="9" name="Text 4"/>
+          <p:cNvSpPr/>
+          <p:nvPr/>
+        </p:nvSpPr>
+        <p:spPr>
+          <a:xfrm>
+            <a:off x="585216" y="2868295"/>
+            <a:ext cx="3867658" cy="1061086"/>
+          </a:xfrm>
+          <a:prstGeom prst="rect">
+            <a:avLst/>
+          </a:prstGeom>
+          <a:noFill/>
+          <a:ln/>
+        </p:spPr>
+        <p:txBody>
+          <a:bodyPr wrap="square" rtlCol="0" anchor="ctr"/>
+          <a:lstStyle/>
+          <a:p>
+            <a:r>
+              <a:rPr lang="en-US" sz="1100" b="1" i="1" dirty="0" err="1" smtClean="0">
+                <a:solidFill>
+                  <a:schemeClr val="accent5">
+                    <a:lumMod val="60000"/>
+                    <a:lumOff val="40000"/>
+                  </a:schemeClr>
+                </a:solidFill>
+                <a:latin typeface="Calibri" pitchFamily="34" charset="0"/>
+                <a:ea typeface="Calibri" pitchFamily="34" charset="-122"/>
+                <a:cs typeface="Calibri" pitchFamily="34" charset="-120"/>
+              </a:rPr>
+              <a:t>Giảng</a:t>
+            </a:r>
+            <a:r>
+              <a:rPr lang="en-US" sz="1100" b="1" i="1" dirty="0" smtClean="0">
+                <a:solidFill>
+                  <a:schemeClr val="accent5">
+                    <a:lumMod val="60000"/>
+                    <a:lumOff val="40000"/>
+                  </a:schemeClr>
+                </a:solidFill>
+                <a:latin typeface="Calibri" pitchFamily="34" charset="0"/>
+                <a:ea typeface="Calibri" pitchFamily="34" charset="-122"/>
+                <a:cs typeface="Calibri" pitchFamily="34" charset="-120"/>
+              </a:rPr>
+              <a:t> </a:t>
+            </a:r>
+            <a:r>
+              <a:rPr lang="en-US" sz="1100" b="1" i="1" dirty="0" err="1" smtClean="0">
+                <a:solidFill>
+                  <a:schemeClr val="accent5">
+                    <a:lumMod val="60000"/>
+                    <a:lumOff val="40000"/>
+                  </a:schemeClr>
+                </a:solidFill>
+                <a:latin typeface="Calibri" pitchFamily="34" charset="0"/>
+                <a:ea typeface="Calibri" pitchFamily="34" charset="-122"/>
+                <a:cs typeface="Calibri" pitchFamily="34" charset="-120"/>
+              </a:rPr>
+              <a:t>viên</a:t>
+            </a:r>
+            <a:r>
+              <a:rPr lang="en-US" sz="1100" b="1" i="1" dirty="0" smtClean="0">
+                <a:solidFill>
+                  <a:schemeClr val="accent5">
+                    <a:lumMod val="60000"/>
+                    <a:lumOff val="40000"/>
+                  </a:schemeClr>
+                </a:solidFill>
+                <a:latin typeface="Calibri" pitchFamily="34" charset="0"/>
+                <a:ea typeface="Calibri" pitchFamily="34" charset="-122"/>
+                <a:cs typeface="Calibri" pitchFamily="34" charset="-120"/>
+              </a:rPr>
+              <a:t> </a:t>
+            </a:r>
+            <a:r>
+              <a:rPr lang="en-US" sz="1100" b="1" i="1" dirty="0" err="1" smtClean="0">
+                <a:solidFill>
+                  <a:schemeClr val="accent5">
+                    <a:lumMod val="60000"/>
+                    <a:lumOff val="40000"/>
+                  </a:schemeClr>
+                </a:solidFill>
+                <a:latin typeface="Calibri" pitchFamily="34" charset="0"/>
+                <a:ea typeface="Calibri" pitchFamily="34" charset="-122"/>
+                <a:cs typeface="Calibri" pitchFamily="34" charset="-120"/>
+              </a:rPr>
+              <a:t>hướng</a:t>
+            </a:r>
+            <a:r>
+              <a:rPr lang="en-US" sz="1100" b="1" i="1" dirty="0" smtClean="0">
+                <a:solidFill>
+                  <a:schemeClr val="accent5">
+                    <a:lumMod val="60000"/>
+                    <a:lumOff val="40000"/>
+                  </a:schemeClr>
+                </a:solidFill>
+                <a:latin typeface="Calibri" pitchFamily="34" charset="0"/>
+                <a:ea typeface="Calibri" pitchFamily="34" charset="-122"/>
+                <a:cs typeface="Calibri" pitchFamily="34" charset="-120"/>
+              </a:rPr>
+              <a:t> </a:t>
+            </a:r>
+            <a:r>
+              <a:rPr lang="en-US" sz="1100" b="1" i="1" dirty="0" err="1" smtClean="0">
+                <a:solidFill>
+                  <a:schemeClr val="accent5">
+                    <a:lumMod val="60000"/>
+                    <a:lumOff val="40000"/>
+                  </a:schemeClr>
+                </a:solidFill>
+                <a:latin typeface="Calibri" pitchFamily="34" charset="0"/>
+                <a:ea typeface="Calibri" pitchFamily="34" charset="-122"/>
+                <a:cs typeface="Calibri" pitchFamily="34" charset="-120"/>
+              </a:rPr>
+              <a:t>dẫn</a:t>
+            </a:r>
+            <a:r>
+              <a:rPr lang="en-US" sz="1100" b="1" i="1" dirty="0">
+                <a:solidFill>
+                  <a:schemeClr val="accent5">
+                    <a:lumMod val="60000"/>
+                    <a:lumOff val="40000"/>
+                  </a:schemeClr>
+                </a:solidFill>
+                <a:latin typeface="Calibri" pitchFamily="34" charset="0"/>
+                <a:ea typeface="Calibri" pitchFamily="34" charset="-122"/>
+                <a:cs typeface="Calibri" pitchFamily="34" charset="-120"/>
+              </a:rPr>
+              <a:t>: TS. </a:t>
+            </a:r>
+            <a:r>
+              <a:rPr lang="en-US" sz="1100" b="1" i="1" dirty="0" err="1">
+                <a:solidFill>
+                  <a:schemeClr val="accent5">
+                    <a:lumMod val="60000"/>
+                    <a:lumOff val="40000"/>
+                  </a:schemeClr>
+                </a:solidFill>
+                <a:latin typeface="Calibri" pitchFamily="34" charset="0"/>
+                <a:ea typeface="Calibri" pitchFamily="34" charset="-122"/>
+                <a:cs typeface="Calibri" pitchFamily="34" charset="-120"/>
+              </a:rPr>
+              <a:t>Trịnh</a:t>
+            </a:r>
+            <a:r>
+              <a:rPr lang="en-US" sz="1100" b="1" i="1" dirty="0">
+                <a:solidFill>
+                  <a:schemeClr val="accent5">
+                    <a:lumMod val="60000"/>
+                    <a:lumOff val="40000"/>
+                  </a:schemeClr>
+                </a:solidFill>
+                <a:latin typeface="Calibri" pitchFamily="34" charset="0"/>
+                <a:ea typeface="Calibri" pitchFamily="34" charset="-122"/>
+                <a:cs typeface="Calibri" pitchFamily="34" charset="-120"/>
+              </a:rPr>
+              <a:t> </a:t>
+            </a:r>
+            <a:r>
+              <a:rPr lang="en-US" sz="1100" b="1" i="1" dirty="0" err="1">
+                <a:solidFill>
+                  <a:schemeClr val="accent5">
+                    <a:lumMod val="60000"/>
+                    <a:lumOff val="40000"/>
+                  </a:schemeClr>
+                </a:solidFill>
+                <a:latin typeface="Calibri" pitchFamily="34" charset="0"/>
+                <a:ea typeface="Calibri" pitchFamily="34" charset="-122"/>
+                <a:cs typeface="Calibri" pitchFamily="34" charset="-120"/>
+              </a:rPr>
+              <a:t>Tuấn</a:t>
+            </a:r>
+            <a:r>
+              <a:rPr lang="en-US" sz="1100" b="1" i="1" dirty="0">
+                <a:solidFill>
+                  <a:schemeClr val="accent5">
+                    <a:lumMod val="60000"/>
+                    <a:lumOff val="40000"/>
+                  </a:schemeClr>
+                </a:solidFill>
+                <a:latin typeface="Calibri" pitchFamily="34" charset="0"/>
+                <a:ea typeface="Calibri" pitchFamily="34" charset="-122"/>
+                <a:cs typeface="Calibri" pitchFamily="34" charset="-120"/>
+              </a:rPr>
+              <a:t> </a:t>
+            </a:r>
+            <a:r>
+              <a:rPr lang="en-US" sz="1100" b="1" i="1" dirty="0" err="1">
+                <a:solidFill>
+                  <a:schemeClr val="accent5">
+                    <a:lumMod val="60000"/>
+                    <a:lumOff val="40000"/>
+                  </a:schemeClr>
+                </a:solidFill>
+                <a:latin typeface="Calibri" pitchFamily="34" charset="0"/>
+                <a:ea typeface="Calibri" pitchFamily="34" charset="-122"/>
+                <a:cs typeface="Calibri" pitchFamily="34" charset="-120"/>
+              </a:rPr>
+              <a:t>Đạt</a:t>
+            </a:r>
+            <a:endParaRPr lang="en-US" sz="1100" b="1" i="1" dirty="0">
+              <a:solidFill>
+                <a:schemeClr val="accent5">
+                  <a:lumMod val="60000"/>
+                  <a:lumOff val="40000"/>
+                </a:schemeClr>
+              </a:solidFill>
+              <a:latin typeface="Calibri" pitchFamily="34" charset="0"/>
+              <a:ea typeface="Calibri" pitchFamily="34" charset="-122"/>
+              <a:cs typeface="Calibri" pitchFamily="34" charset="-120"/>
+            </a:endParaRPr>
+          </a:p>
+          <a:p>
+            <a:endParaRPr lang="en-US" sz="1100" b="1" i="1" dirty="0" smtClean="0">
+              <a:solidFill>
+                <a:schemeClr val="accent5">
+                  <a:lumMod val="60000"/>
+                  <a:lumOff val="40000"/>
+                </a:schemeClr>
+              </a:solidFill>
+              <a:latin typeface="Calibri" pitchFamily="34" charset="0"/>
+              <a:ea typeface="Calibri" pitchFamily="34" charset="-122"/>
+              <a:cs typeface="Calibri" pitchFamily="34" charset="-120"/>
+            </a:endParaRPr>
+          </a:p>
+          <a:p>
+            <a:r>
+              <a:rPr lang="en-US" sz="1100" b="1" i="1" dirty="0" err="1" smtClean="0">
+                <a:solidFill>
+                  <a:schemeClr val="accent5">
+                    <a:lumMod val="60000"/>
+                    <a:lumOff val="40000"/>
+                  </a:schemeClr>
+                </a:solidFill>
+                <a:latin typeface="Calibri" pitchFamily="34" charset="0"/>
+                <a:ea typeface="Calibri" pitchFamily="34" charset="-122"/>
+                <a:cs typeface="Calibri" pitchFamily="34" charset="-120"/>
+              </a:rPr>
+              <a:t>Nhóm</a:t>
+            </a:r>
+            <a:r>
+              <a:rPr lang="en-US" sz="1100" b="1" i="1" dirty="0" smtClean="0">
+                <a:solidFill>
+                  <a:schemeClr val="accent5">
+                    <a:lumMod val="60000"/>
+                    <a:lumOff val="40000"/>
+                  </a:schemeClr>
+                </a:solidFill>
+                <a:latin typeface="Calibri" pitchFamily="34" charset="0"/>
+                <a:ea typeface="Calibri" pitchFamily="34" charset="-122"/>
+                <a:cs typeface="Calibri" pitchFamily="34" charset="-120"/>
+              </a:rPr>
+              <a:t> 5:</a:t>
+            </a:r>
+            <a:br>
+              <a:rPr lang="en-US" sz="1100" b="1" i="1" dirty="0" smtClean="0">
+                <a:solidFill>
+                  <a:schemeClr val="accent5">
+                    <a:lumMod val="60000"/>
+                    <a:lumOff val="40000"/>
+                  </a:schemeClr>
+                </a:solidFill>
+                <a:latin typeface="Calibri" pitchFamily="34" charset="0"/>
+                <a:ea typeface="Calibri" pitchFamily="34" charset="-122"/>
+                <a:cs typeface="Calibri" pitchFamily="34" charset="-120"/>
+              </a:rPr>
+            </a:br>
+            <a:r>
+              <a:rPr lang="en-US" sz="1100" b="1" i="1" dirty="0" smtClean="0">
+                <a:solidFill>
+                  <a:schemeClr val="accent5">
+                    <a:lumMod val="60000"/>
+                    <a:lumOff val="40000"/>
+                  </a:schemeClr>
+                </a:solidFill>
+                <a:latin typeface="Calibri" pitchFamily="34" charset="0"/>
+                <a:ea typeface="Calibri" pitchFamily="34" charset="-122"/>
+                <a:cs typeface="Calibri" pitchFamily="34" charset="-120"/>
+              </a:rPr>
+              <a:t>               </a:t>
+            </a:r>
+            <a:r>
+              <a:rPr lang="en-US" sz="1100" b="1" i="1" dirty="0" err="1" smtClean="0">
+                <a:solidFill>
+                  <a:schemeClr val="accent5">
+                    <a:lumMod val="60000"/>
+                    <a:lumOff val="40000"/>
+                  </a:schemeClr>
+                </a:solidFill>
+                <a:latin typeface="Calibri" pitchFamily="34" charset="0"/>
+                <a:ea typeface="Calibri" pitchFamily="34" charset="-122"/>
+                <a:cs typeface="Calibri" pitchFamily="34" charset="-120"/>
+              </a:rPr>
+              <a:t>Đoàn</a:t>
+            </a:r>
+            <a:r>
+              <a:rPr lang="en-US" sz="1100" b="1" i="1" dirty="0" smtClean="0">
+                <a:solidFill>
+                  <a:schemeClr val="accent5">
+                    <a:lumMod val="60000"/>
+                    <a:lumOff val="40000"/>
+                  </a:schemeClr>
+                </a:solidFill>
+                <a:latin typeface="Calibri" pitchFamily="34" charset="0"/>
+                <a:ea typeface="Calibri" pitchFamily="34" charset="-122"/>
+                <a:cs typeface="Calibri" pitchFamily="34" charset="-120"/>
+              </a:rPr>
+              <a:t> </a:t>
+            </a:r>
+            <a:r>
+              <a:rPr lang="en-US" sz="1100" b="1" i="1" dirty="0" err="1" smtClean="0">
+                <a:solidFill>
+                  <a:schemeClr val="accent5">
+                    <a:lumMod val="60000"/>
+                    <a:lumOff val="40000"/>
+                  </a:schemeClr>
+                </a:solidFill>
+                <a:latin typeface="Calibri" pitchFamily="34" charset="0"/>
+                <a:ea typeface="Calibri" pitchFamily="34" charset="-122"/>
+                <a:cs typeface="Calibri" pitchFamily="34" charset="-120"/>
+              </a:rPr>
+              <a:t>Ngọc</a:t>
+            </a:r>
+            <a:r>
+              <a:rPr lang="en-US" sz="1100" b="1" i="1" dirty="0" smtClean="0">
+                <a:solidFill>
+                  <a:schemeClr val="accent5">
+                    <a:lumMod val="60000"/>
+                    <a:lumOff val="40000"/>
+                  </a:schemeClr>
+                </a:solidFill>
+                <a:latin typeface="Calibri" pitchFamily="34" charset="0"/>
+                <a:ea typeface="Calibri" pitchFamily="34" charset="-122"/>
+                <a:cs typeface="Calibri" pitchFamily="34" charset="-120"/>
+              </a:rPr>
+              <a:t> </a:t>
+            </a:r>
+            <a:r>
+              <a:rPr lang="en-US" sz="1100" b="1" i="1" dirty="0">
+                <a:solidFill>
+                  <a:schemeClr val="accent5">
+                    <a:lumMod val="60000"/>
+                    <a:lumOff val="40000"/>
+                  </a:schemeClr>
+                </a:solidFill>
+                <a:latin typeface="Calibri" pitchFamily="34" charset="0"/>
+                <a:ea typeface="Calibri" pitchFamily="34" charset="-122"/>
+                <a:cs typeface="Calibri" pitchFamily="34" charset="-120"/>
+              </a:rPr>
+              <a:t>Minh </a:t>
+            </a:r>
+            <a:r>
+              <a:rPr lang="en-US" sz="1100" b="1" i="1" dirty="0" smtClean="0">
+                <a:solidFill>
+                  <a:schemeClr val="accent5">
+                    <a:lumMod val="60000"/>
+                    <a:lumOff val="40000"/>
+                  </a:schemeClr>
+                </a:solidFill>
+                <a:latin typeface="Calibri" pitchFamily="34" charset="0"/>
+                <a:ea typeface="Calibri" pitchFamily="34" charset="-122"/>
+                <a:cs typeface="Calibri" pitchFamily="34" charset="-120"/>
+              </a:rPr>
+              <a:t>- </a:t>
+            </a:r>
+            <a:r>
+              <a:rPr lang="en-US" sz="1100" b="1" i="1" dirty="0">
+                <a:solidFill>
+                  <a:schemeClr val="accent5">
+                    <a:lumMod val="60000"/>
+                    <a:lumOff val="40000"/>
+                  </a:schemeClr>
+                </a:solidFill>
+                <a:latin typeface="Calibri" pitchFamily="34" charset="0"/>
+                <a:ea typeface="Calibri" pitchFamily="34" charset="-122"/>
+                <a:cs typeface="Calibri" pitchFamily="34" charset="-120"/>
+              </a:rPr>
+              <a:t>20251067M </a:t>
+            </a:r>
+            <a:endParaRPr lang="en-US" sz="1100" b="1" i="1" dirty="0" smtClean="0">
+              <a:solidFill>
+                <a:schemeClr val="accent5">
+                  <a:lumMod val="60000"/>
+                  <a:lumOff val="40000"/>
+                </a:schemeClr>
+              </a:solidFill>
+              <a:latin typeface="Calibri" pitchFamily="34" charset="0"/>
+              <a:ea typeface="Calibri" pitchFamily="34" charset="-122"/>
+              <a:cs typeface="Calibri" pitchFamily="34" charset="-120"/>
+            </a:endParaRPr>
+          </a:p>
+          <a:p>
+            <a:r>
+              <a:rPr lang="en-US" sz="1100" b="1" i="1" dirty="0" smtClean="0">
+                <a:solidFill>
+                  <a:schemeClr val="accent5">
+                    <a:lumMod val="60000"/>
+                    <a:lumOff val="40000"/>
+                  </a:schemeClr>
+                </a:solidFill>
+                <a:latin typeface="Calibri" pitchFamily="34" charset="0"/>
+                <a:ea typeface="Calibri" pitchFamily="34" charset="-122"/>
+                <a:cs typeface="Calibri" pitchFamily="34" charset="-120"/>
+              </a:rPr>
+              <a:t>               Nguyễn Tiến </a:t>
+            </a:r>
+            <a:r>
+              <a:rPr lang="en-US" sz="1100" b="1" i="1" dirty="0">
+                <a:solidFill>
+                  <a:schemeClr val="accent5">
+                    <a:lumMod val="60000"/>
+                    <a:lumOff val="40000"/>
+                  </a:schemeClr>
+                </a:solidFill>
+                <a:latin typeface="Calibri" pitchFamily="34" charset="0"/>
+                <a:ea typeface="Calibri" pitchFamily="34" charset="-122"/>
+                <a:cs typeface="Calibri" pitchFamily="34" charset="-120"/>
+              </a:rPr>
+              <a:t>Lâm - 20251061M </a:t>
+            </a:r>
+            <a:endParaRPr lang="en-US" sz="1100" b="1" dirty="0">
+              <a:solidFill>
+                <a:schemeClr val="accent5">
+                  <a:lumMod val="60000"/>
+                  <a:lumOff val="40000"/>
+                </a:schemeClr>
+              </a:solidFill>
+            </a:endParaRPr>
           </a:p>
         </p:txBody>
       </p:sp>
@@ -3128,7 +3583,84 @@
                 <a:ea typeface="Calibri" pitchFamily="34" charset="-122"/>
                 <a:cs typeface="Calibri" pitchFamily="34" charset="-120"/>
               </a:rPr>
-              <a:t>03 — Cong nghe su dung</a:t>
+              <a:t>03 — </a:t>
+            </a:r>
+            <a:r>
+              <a:rPr lang="en-US" sz="900" i="1" dirty="0" err="1" smtClean="0">
+                <a:solidFill>
+                  <a:srgbClr val="94A3B8"/>
+                </a:solidFill>
+                <a:latin typeface="Calibri" pitchFamily="34" charset="0"/>
+                <a:ea typeface="Calibri" pitchFamily="34" charset="-122"/>
+                <a:cs typeface="Calibri" pitchFamily="34" charset="-120"/>
+              </a:rPr>
+              <a:t>Công</a:t>
+            </a:r>
+            <a:r>
+              <a:rPr lang="en-US" sz="900" i="1" dirty="0" smtClean="0">
+                <a:solidFill>
+                  <a:srgbClr val="94A3B8"/>
+                </a:solidFill>
+                <a:latin typeface="Calibri" pitchFamily="34" charset="0"/>
+                <a:ea typeface="Calibri" pitchFamily="34" charset="-122"/>
+                <a:cs typeface="Calibri" pitchFamily="34" charset="-120"/>
+              </a:rPr>
+              <a:t> </a:t>
+            </a:r>
+            <a:r>
+              <a:rPr lang="en-US" sz="900" i="1" dirty="0" err="1" smtClean="0">
+                <a:solidFill>
+                  <a:srgbClr val="94A3B8"/>
+                </a:solidFill>
+                <a:latin typeface="Calibri" pitchFamily="34" charset="0"/>
+                <a:ea typeface="Calibri" pitchFamily="34" charset="-122"/>
+                <a:cs typeface="Calibri" pitchFamily="34" charset="-120"/>
+              </a:rPr>
+              <a:t>nghệ</a:t>
+            </a:r>
+            <a:r>
+              <a:rPr lang="en-US" sz="900" i="1" dirty="0" smtClean="0">
+                <a:solidFill>
+                  <a:srgbClr val="94A3B8"/>
+                </a:solidFill>
+                <a:latin typeface="Calibri" pitchFamily="34" charset="0"/>
+                <a:ea typeface="Calibri" pitchFamily="34" charset="-122"/>
+                <a:cs typeface="Calibri" pitchFamily="34" charset="-120"/>
+              </a:rPr>
+              <a:t> </a:t>
+            </a:r>
+            <a:r>
+              <a:rPr lang="en-US" sz="900" i="1" dirty="0" err="1" smtClean="0">
+                <a:solidFill>
+                  <a:srgbClr val="94A3B8"/>
+                </a:solidFill>
+                <a:latin typeface="Calibri" pitchFamily="34" charset="0"/>
+                <a:ea typeface="Calibri" pitchFamily="34" charset="-122"/>
+                <a:cs typeface="Calibri" pitchFamily="34" charset="-120"/>
+              </a:rPr>
+              <a:t>sử</a:t>
+            </a:r>
+            <a:r>
+              <a:rPr lang="en-US" sz="900" i="1" dirty="0" smtClean="0">
+                <a:solidFill>
+                  <a:srgbClr val="94A3B8"/>
+                </a:solidFill>
+                <a:latin typeface="Calibri" pitchFamily="34" charset="0"/>
+                <a:ea typeface="Calibri" pitchFamily="34" charset="-122"/>
+                <a:cs typeface="Calibri" pitchFamily="34" charset="-120"/>
+              </a:rPr>
+              <a:t> </a:t>
+            </a:r>
+            <a:r>
+              <a:rPr lang="en-US" sz="900" i="1" dirty="0" err="1" smtClean="0">
+                <a:solidFill>
+                  <a:srgbClr val="94A3B8"/>
+                </a:solidFill>
+                <a:latin typeface="Calibri" pitchFamily="34" charset="0"/>
+                <a:ea typeface="Calibri" pitchFamily="34" charset="-122"/>
+                <a:cs typeface="Calibri" pitchFamily="34" charset="-120"/>
+              </a:rPr>
+              <a:t>dụng</a:t>
             </a:r>
             <a:endParaRPr lang="en-US" sz="900" dirty="0"/>
           </a:p>
@@ -3222,18 +3754,7 @@
                 <a:ea typeface="Calibri" pitchFamily="34" charset="-122"/>
                 <a:cs typeface="Calibri" pitchFamily="34" charset="-120"/>
               </a:rPr>
-              <a:t> </a:t>
-            </a:r>
-            <a:r>
-              <a:rPr lang="en-US" sz="2800" b="1" dirty="0" smtClean="0">
-                <a:solidFill>
-                  <a:srgbClr val="FFFFFF"/>
-                </a:solidFill>
-                <a:latin typeface="Calibri" pitchFamily="34" charset="0"/>
-                <a:ea typeface="Calibri" pitchFamily="34" charset="-122"/>
-                <a:cs typeface="Calibri" pitchFamily="34" charset="-120"/>
-              </a:rPr>
-              <a:t>monitor</a:t>
+              <a:t> monitor</a:t>
             </a:r>
             <a:endParaRPr lang="en-US" sz="2800" dirty="0"/>
           </a:p>
@@ -4482,45 +5003,6 @@
       </p:sp>
       <p:sp>
         <p:nvSpPr>
-          <p:cNvPr id="4" name="Text 2"/>
-          <p:cNvSpPr/>
-          <p:nvPr/>
-        </p:nvSpPr>
-        <p:spPr>
-          <a:xfrm>
-            <a:off x="548640" y="182880"/>
-            <a:ext cx="4572000" cy="274320"/>
-          </a:xfrm>
-          <a:prstGeom prst="rect">
-            <a:avLst/>
-          </a:prstGeom>
-          <a:noFill/>
-          <a:ln/>
-        </p:spPr>
-        <p:txBody>
-          <a:bodyPr wrap="square" rtlCol="0" anchor="ctr"/>
-          <a:lstStyle/>
-          <a:p>
-            <a:pPr marL="0" indent="0">
-              <a:buNone/>
-            </a:pPr>
-            <a:r>
-              <a:rPr lang="en-US" sz="900" i="1" dirty="0">
-                <a:solidFill>
-                  <a:srgbClr val="94A3B8"/>
-                </a:solidFill>
-                <a:latin typeface="Calibri" pitchFamily="34" charset="0"/>
-                <a:ea typeface="Calibri" pitchFamily="34" charset="-122"/>
-                <a:cs typeface="Calibri" pitchFamily="34" charset="-120"/>
-              </a:rPr>
-              <a:t>04 — Pipeline xu ly du lieu</a:t>
-            </a:r>
-            <a:endParaRPr lang="en-US" sz="900" dirty="0"/>
-          </a:p>
-        </p:txBody>
-      </p:sp>
-      <p:sp>
-        <p:nvSpPr>
           <p:cNvPr id="5" name="Text 3"/>
           <p:cNvSpPr/>
           <p:nvPr/>
@@ -5770,6 +6252,122 @@
               <a:t>Index + Alert</a:t>
             </a:r>
             <a:endParaRPr lang="en-US" sz="1000" dirty="0"/>
+          </a:p>
+        </p:txBody>
+      </p:sp>
+      <p:sp>
+        <p:nvSpPr>
+          <p:cNvPr id="33" name="Text 2"/>
+          <p:cNvSpPr/>
+          <p:nvPr/>
+        </p:nvSpPr>
+        <p:spPr>
+          <a:xfrm>
+            <a:off x="548640" y="182880"/>
+            <a:ext cx="4572000" cy="274320"/>
+          </a:xfrm>
+          <a:prstGeom prst="rect">
+            <a:avLst/>
+          </a:prstGeom>
+          <a:noFill/>
+          <a:ln/>
+        </p:spPr>
+        <p:txBody>
+          <a:bodyPr wrap="square" rtlCol="0" anchor="ctr"/>
+          <a:lstStyle/>
+          <a:p>
+            <a:pPr marL="0" indent="0">
+              <a:buNone/>
+            </a:pPr>
+            <a:r>
+              <a:rPr lang="en-US" sz="900" i="1" dirty="0">
+                <a:solidFill>
+                  <a:srgbClr val="94A3B8"/>
+                </a:solidFill>
+                <a:latin typeface="Calibri" pitchFamily="34" charset="0"/>
+                <a:ea typeface="Calibri" pitchFamily="34" charset="-122"/>
+                <a:cs typeface="Calibri" pitchFamily="34" charset="-120"/>
+              </a:rPr>
+              <a:t>04 — Pipeline </a:t>
+            </a:r>
+            <a:r>
+              <a:rPr lang="en-US" sz="900" i="1" dirty="0" err="1" smtClean="0">
+                <a:solidFill>
+                  <a:srgbClr val="94A3B8"/>
+                </a:solidFill>
+                <a:latin typeface="Calibri" pitchFamily="34" charset="0"/>
+                <a:ea typeface="Calibri" pitchFamily="34" charset="-122"/>
+                <a:cs typeface="Calibri" pitchFamily="34" charset="-120"/>
+              </a:rPr>
+              <a:t>xử</a:t>
+            </a:r>
+            <a:r>
+              <a:rPr lang="en-US" sz="900" i="1" dirty="0" smtClean="0">
+                <a:solidFill>
+                  <a:srgbClr val="94A3B8"/>
+                </a:solidFill>
+                <a:latin typeface="Calibri" pitchFamily="34" charset="0"/>
+                <a:ea typeface="Calibri" pitchFamily="34" charset="-122"/>
+                <a:cs typeface="Calibri" pitchFamily="34" charset="-120"/>
+              </a:rPr>
+              <a:t> </a:t>
+            </a:r>
+            <a:r>
+              <a:rPr lang="en-US" sz="900" i="1" dirty="0" err="1" smtClean="0">
+                <a:solidFill>
+                  <a:srgbClr val="94A3B8"/>
+                </a:solidFill>
+                <a:latin typeface="Calibri" pitchFamily="34" charset="0"/>
+                <a:ea typeface="Calibri" pitchFamily="34" charset="-122"/>
+                <a:cs typeface="Calibri" pitchFamily="34" charset="-120"/>
+              </a:rPr>
+              <a:t>lý</a:t>
+            </a:r>
+            <a:r>
+              <a:rPr lang="en-US" sz="900" i="1" dirty="0" smtClean="0">
+                <a:solidFill>
+                  <a:srgbClr val="94A3B8"/>
+                </a:solidFill>
+                <a:latin typeface="Calibri" pitchFamily="34" charset="0"/>
+                <a:ea typeface="Calibri" pitchFamily="34" charset="-122"/>
+                <a:cs typeface="Calibri" pitchFamily="34" charset="-120"/>
+              </a:rPr>
+              <a:t> </a:t>
+            </a:r>
+            <a:r>
+              <a:rPr lang="en-US" sz="900" i="1" dirty="0" err="1" smtClean="0">
+                <a:solidFill>
+                  <a:srgbClr val="94A3B8"/>
+                </a:solidFill>
+                <a:latin typeface="Calibri" pitchFamily="34" charset="0"/>
+                <a:ea typeface="Calibri" pitchFamily="34" charset="-122"/>
+                <a:cs typeface="Calibri" pitchFamily="34" charset="-120"/>
+              </a:rPr>
+              <a:t>dữ</a:t>
+            </a:r>
+            <a:r>
+              <a:rPr lang="en-US" sz="900" i="1" dirty="0" smtClean="0">
+                <a:solidFill>
+                  <a:srgbClr val="94A3B8"/>
+                </a:solidFill>
+                <a:latin typeface="Calibri" pitchFamily="34" charset="0"/>
+                <a:ea typeface="Calibri" pitchFamily="34" charset="-122"/>
+                <a:cs typeface="Calibri" pitchFamily="34" charset="-120"/>
+              </a:rPr>
+              <a:t> </a:t>
+            </a:r>
+            <a:r>
+              <a:rPr lang="en-US" sz="900" i="1" dirty="0" err="1" smtClean="0">
+                <a:solidFill>
+                  <a:srgbClr val="94A3B8"/>
+                </a:solidFill>
+                <a:latin typeface="Calibri" pitchFamily="34" charset="0"/>
+                <a:ea typeface="Calibri" pitchFamily="34" charset="-122"/>
+                <a:cs typeface="Calibri" pitchFamily="34" charset="-120"/>
+              </a:rPr>
+              <a:t>liệu</a:t>
+            </a:r>
+            <a:endParaRPr lang="en-US" sz="900" dirty="0"/>
           </a:p>
         </p:txBody>
       </p:sp>
@@ -5898,7 +6496,84 @@
                 <a:ea typeface="Calibri" pitchFamily="34" charset="-122"/>
                 <a:cs typeface="Calibri" pitchFamily="34" charset="-120"/>
               </a:rPr>
-              <a:t>04 — Pipeline xu ly du lieu</a:t>
+              <a:t>04 — Pipeline </a:t>
+            </a:r>
+            <a:r>
+              <a:rPr lang="en-US" sz="900" i="1" dirty="0" err="1" smtClean="0">
+                <a:solidFill>
+                  <a:srgbClr val="94A3B8"/>
+                </a:solidFill>
+                <a:latin typeface="Calibri" pitchFamily="34" charset="0"/>
+                <a:ea typeface="Calibri" pitchFamily="34" charset="-122"/>
+                <a:cs typeface="Calibri" pitchFamily="34" charset="-120"/>
+              </a:rPr>
+              <a:t>xử</a:t>
+            </a:r>
+            <a:r>
+              <a:rPr lang="en-US" sz="900" i="1" dirty="0" smtClean="0">
+                <a:solidFill>
+                  <a:srgbClr val="94A3B8"/>
+                </a:solidFill>
+                <a:latin typeface="Calibri" pitchFamily="34" charset="0"/>
+                <a:ea typeface="Calibri" pitchFamily="34" charset="-122"/>
+                <a:cs typeface="Calibri" pitchFamily="34" charset="-120"/>
+              </a:rPr>
+              <a:t> </a:t>
+            </a:r>
+            <a:r>
+              <a:rPr lang="en-US" sz="900" i="1" dirty="0" err="1" smtClean="0">
+                <a:solidFill>
+                  <a:srgbClr val="94A3B8"/>
+                </a:solidFill>
+                <a:latin typeface="Calibri" pitchFamily="34" charset="0"/>
+                <a:ea typeface="Calibri" pitchFamily="34" charset="-122"/>
+                <a:cs typeface="Calibri" pitchFamily="34" charset="-120"/>
+              </a:rPr>
+              <a:t>lý</a:t>
+            </a:r>
+            <a:r>
+              <a:rPr lang="en-US" sz="900" i="1" dirty="0" smtClean="0">
+                <a:solidFill>
+                  <a:srgbClr val="94A3B8"/>
+                </a:solidFill>
+                <a:latin typeface="Calibri" pitchFamily="34" charset="0"/>
+                <a:ea typeface="Calibri" pitchFamily="34" charset="-122"/>
+                <a:cs typeface="Calibri" pitchFamily="34" charset="-120"/>
+              </a:rPr>
+              <a:t> </a:t>
+            </a:r>
+            <a:r>
+              <a:rPr lang="en-US" sz="900" i="1" dirty="0" err="1" smtClean="0">
+                <a:solidFill>
+                  <a:srgbClr val="94A3B8"/>
+                </a:solidFill>
+                <a:latin typeface="Calibri" pitchFamily="34" charset="0"/>
+                <a:ea typeface="Calibri" pitchFamily="34" charset="-122"/>
+                <a:cs typeface="Calibri" pitchFamily="34" charset="-120"/>
+              </a:rPr>
+              <a:t>dữ</a:t>
+            </a:r>
+            <a:r>
+              <a:rPr lang="en-US" sz="900" i="1" dirty="0" smtClean="0">
+                <a:solidFill>
+                  <a:srgbClr val="94A3B8"/>
+                </a:solidFill>
+                <a:latin typeface="Calibri" pitchFamily="34" charset="0"/>
+                <a:ea typeface="Calibri" pitchFamily="34" charset="-122"/>
+                <a:cs typeface="Calibri" pitchFamily="34" charset="-120"/>
+              </a:rPr>
+              <a:t> </a:t>
+            </a:r>
+            <a:r>
+              <a:rPr lang="en-US" sz="900" i="1" dirty="0" err="1" smtClean="0">
+                <a:solidFill>
+                  <a:srgbClr val="94A3B8"/>
+                </a:solidFill>
+                <a:latin typeface="Calibri" pitchFamily="34" charset="0"/>
+                <a:ea typeface="Calibri" pitchFamily="34" charset="-122"/>
+                <a:cs typeface="Calibri" pitchFamily="34" charset="-120"/>
+              </a:rPr>
+              <a:t>liệu</a:t>
             </a:r>
             <a:endParaRPr lang="en-US" sz="900" dirty="0"/>
           </a:p>
@@ -7299,45 +7974,6 @@
       </p:sp>
       <p:sp>
         <p:nvSpPr>
-          <p:cNvPr id="4" name="Text 2"/>
-          <p:cNvSpPr/>
-          <p:nvPr/>
-        </p:nvSpPr>
-        <p:spPr>
-          <a:xfrm>
-            <a:off x="548640" y="182880"/>
-            <a:ext cx="4572000" cy="274320"/>
-          </a:xfrm>
-          <a:prstGeom prst="rect">
-            <a:avLst/>
-          </a:prstGeom>
-          <a:noFill/>
-          <a:ln/>
-        </p:spPr>
-        <p:txBody>
-          <a:bodyPr wrap="square" rtlCol="0" anchor="ctr"/>
-          <a:lstStyle/>
-          <a:p>
-            <a:pPr marL="0" indent="0">
-              <a:buNone/>
-            </a:pPr>
-            <a:r>
-              <a:rPr lang="en-US" sz="900" i="1" dirty="0">
-                <a:solidFill>
-                  <a:srgbClr val="94A3B8"/>
-                </a:solidFill>
-                <a:latin typeface="Calibri" pitchFamily="34" charset="0"/>
-                <a:ea typeface="Calibri" pitchFamily="34" charset="-122"/>
-                <a:cs typeface="Calibri" pitchFamily="34" charset="-120"/>
-              </a:rPr>
-              <a:t>05 — Thuat toan phat hien bat thuong</a:t>
-            </a:r>
-            <a:endParaRPr lang="en-US" sz="900" dirty="0"/>
-          </a:p>
-        </p:txBody>
-      </p:sp>
-      <p:sp>
-        <p:nvSpPr>
           <p:cNvPr id="5" name="Text 3"/>
           <p:cNvSpPr/>
           <p:nvPr/>
@@ -8603,6 +9239,166 @@
               <a:t>Capacity 10,000 / 300s window = toi da 33 msg/s/service. Rate cao hon → entry moi ghi de entry cu → window thuc te &lt; 5 phut.</a:t>
             </a:r>
             <a:endParaRPr lang="en-US" sz="1100" dirty="0"/>
+          </a:p>
+        </p:txBody>
+      </p:sp>
+      <p:sp>
+        <p:nvSpPr>
+          <p:cNvPr id="36" name="Text 2"/>
+          <p:cNvSpPr/>
+          <p:nvPr/>
+        </p:nvSpPr>
+        <p:spPr>
+          <a:xfrm>
+            <a:off x="548640" y="182880"/>
+            <a:ext cx="4572000" cy="274320"/>
+          </a:xfrm>
+          <a:prstGeom prst="rect">
+            <a:avLst/>
+          </a:prstGeom>
+          <a:noFill/>
+          <a:ln/>
+        </p:spPr>
+        <p:txBody>
+          <a:bodyPr wrap="square" rtlCol="0" anchor="ctr"/>
+          <a:lstStyle/>
+          <a:p>
+            <a:pPr marL="0" indent="0">
+              <a:buNone/>
+            </a:pPr>
+            <a:r>
+              <a:rPr lang="en-US" sz="900" i="1" dirty="0">
+                <a:solidFill>
+                  <a:srgbClr val="94A3B8"/>
+                </a:solidFill>
+                <a:latin typeface="Calibri" pitchFamily="34" charset="0"/>
+                <a:ea typeface="Calibri" pitchFamily="34" charset="-122"/>
+                <a:cs typeface="Calibri" pitchFamily="34" charset="-120"/>
+              </a:rPr>
+              <a:t>05 — </a:t>
+            </a:r>
+            <a:r>
+              <a:rPr lang="en-US" sz="900" i="1" dirty="0" err="1" smtClean="0">
+                <a:solidFill>
+                  <a:srgbClr val="94A3B8"/>
+                </a:solidFill>
+                <a:latin typeface="Calibri" pitchFamily="34" charset="0"/>
+                <a:ea typeface="Calibri" pitchFamily="34" charset="-122"/>
+                <a:cs typeface="Calibri" pitchFamily="34" charset="-120"/>
+              </a:rPr>
+              <a:t>Thuật</a:t>
+            </a:r>
+            <a:r>
+              <a:rPr lang="en-US" sz="900" i="1" dirty="0" smtClean="0">
+                <a:solidFill>
+                  <a:srgbClr val="94A3B8"/>
+                </a:solidFill>
+                <a:latin typeface="Calibri" pitchFamily="34" charset="0"/>
+                <a:ea typeface="Calibri" pitchFamily="34" charset="-122"/>
+                <a:cs typeface="Calibri" pitchFamily="34" charset="-120"/>
+              </a:rPr>
+              <a:t> </a:t>
+            </a:r>
+            <a:r>
+              <a:rPr lang="en-US" sz="900" i="1" dirty="0" err="1" smtClean="0">
+                <a:solidFill>
+                  <a:srgbClr val="94A3B8"/>
+                </a:solidFill>
+                <a:latin typeface="Calibri" pitchFamily="34" charset="0"/>
+                <a:ea typeface="Calibri" pitchFamily="34" charset="-122"/>
+                <a:cs typeface="Calibri" pitchFamily="34" charset="-120"/>
+              </a:rPr>
+              <a:t>toán</a:t>
+            </a:r>
+            <a:r>
+              <a:rPr lang="en-US" sz="900" i="1" dirty="0" smtClean="0">
+                <a:solidFill>
+                  <a:srgbClr val="94A3B8"/>
+                </a:solidFill>
+                <a:latin typeface="Calibri" pitchFamily="34" charset="0"/>
+                <a:ea typeface="Calibri" pitchFamily="34" charset="-122"/>
+                <a:cs typeface="Calibri" pitchFamily="34" charset="-120"/>
+              </a:rPr>
+              <a:t> </a:t>
+            </a:r>
+            <a:r>
+              <a:rPr lang="en-US" sz="900" i="1" dirty="0" err="1" smtClean="0">
+                <a:solidFill>
+                  <a:srgbClr val="94A3B8"/>
+                </a:solidFill>
+                <a:latin typeface="Calibri" pitchFamily="34" charset="0"/>
+                <a:ea typeface="Calibri" pitchFamily="34" charset="-122"/>
+                <a:cs typeface="Calibri" pitchFamily="34" charset="-120"/>
+              </a:rPr>
+              <a:t>phát</a:t>
+            </a:r>
+            <a:r>
+              <a:rPr lang="en-US" sz="900" i="1" dirty="0" smtClean="0">
+                <a:solidFill>
+                  <a:srgbClr val="94A3B8"/>
+                </a:solidFill>
+                <a:latin typeface="Calibri" pitchFamily="34" charset="0"/>
+                <a:ea typeface="Calibri" pitchFamily="34" charset="-122"/>
+                <a:cs typeface="Calibri" pitchFamily="34" charset="-120"/>
+              </a:rPr>
+              <a:t> </a:t>
+            </a:r>
+            <a:r>
+              <a:rPr lang="en-US" sz="900" i="1" dirty="0" err="1" smtClean="0">
+                <a:solidFill>
+                  <a:srgbClr val="94A3B8"/>
+                </a:solidFill>
+                <a:latin typeface="Calibri" pitchFamily="34" charset="0"/>
+                <a:ea typeface="Calibri" pitchFamily="34" charset="-122"/>
+                <a:cs typeface="Calibri" pitchFamily="34" charset="-120"/>
+              </a:rPr>
+              <a:t>hiện</a:t>
+            </a:r>
+            <a:r>
+              <a:rPr lang="en-US" sz="900" i="1" dirty="0" smtClean="0">
+                <a:solidFill>
+                  <a:srgbClr val="94A3B8"/>
+                </a:solidFill>
+                <a:latin typeface="Calibri" pitchFamily="34" charset="0"/>
+                <a:ea typeface="Calibri" pitchFamily="34" charset="-122"/>
+                <a:cs typeface="Calibri" pitchFamily="34" charset="-120"/>
+              </a:rPr>
+              <a:t> </a:t>
+            </a:r>
+            <a:r>
+              <a:rPr lang="en-US" sz="900" i="1" dirty="0" err="1" smtClean="0">
+                <a:solidFill>
+                  <a:srgbClr val="94A3B8"/>
+                </a:solidFill>
+                <a:latin typeface="Calibri" pitchFamily="34" charset="0"/>
+                <a:ea typeface="Calibri" pitchFamily="34" charset="-122"/>
+                <a:cs typeface="Calibri" pitchFamily="34" charset="-120"/>
+              </a:rPr>
+              <a:t>bất</a:t>
+            </a:r>
+            <a:r>
+              <a:rPr lang="en-US" sz="900" i="1" dirty="0" smtClean="0">
+                <a:solidFill>
+                  <a:srgbClr val="94A3B8"/>
+                </a:solidFill>
+                <a:latin typeface="Calibri" pitchFamily="34" charset="0"/>
+                <a:ea typeface="Calibri" pitchFamily="34" charset="-122"/>
+                <a:cs typeface="Calibri" pitchFamily="34" charset="-120"/>
+              </a:rPr>
+              <a:t> </a:t>
+            </a:r>
+            <a:r>
+              <a:rPr lang="en-US" sz="900" i="1" dirty="0" err="1" smtClean="0">
+                <a:solidFill>
+                  <a:srgbClr val="94A3B8"/>
+                </a:solidFill>
+                <a:latin typeface="Calibri" pitchFamily="34" charset="0"/>
+                <a:ea typeface="Calibri" pitchFamily="34" charset="-122"/>
+                <a:cs typeface="Calibri" pitchFamily="34" charset="-120"/>
+              </a:rPr>
+              <a:t>thường</a:t>
+            </a:r>
+            <a:endParaRPr lang="en-US" sz="900" dirty="0"/>
           </a:p>
         </p:txBody>
       </p:sp>
@@ -8700,45 +9496,6 @@
       </p:sp>
       <p:sp>
         <p:nvSpPr>
-          <p:cNvPr id="4" name="Text 2"/>
-          <p:cNvSpPr/>
-          <p:nvPr/>
-        </p:nvSpPr>
-        <p:spPr>
-          <a:xfrm>
-            <a:off x="548640" y="182880"/>
-            <a:ext cx="4572000" cy="274320"/>
-          </a:xfrm>
-          <a:prstGeom prst="rect">
-            <a:avLst/>
-          </a:prstGeom>
-          <a:noFill/>
-          <a:ln/>
-        </p:spPr>
-        <p:txBody>
-          <a:bodyPr wrap="square" rtlCol="0" anchor="ctr"/>
-          <a:lstStyle/>
-          <a:p>
-            <a:pPr marL="0" indent="0">
-              <a:buNone/>
-            </a:pPr>
-            <a:r>
-              <a:rPr lang="en-US" sz="900" i="1" dirty="0">
-                <a:solidFill>
-                  <a:srgbClr val="94A3B8"/>
-                </a:solidFill>
-                <a:latin typeface="Calibri" pitchFamily="34" charset="0"/>
-                <a:ea typeface="Calibri" pitchFamily="34" charset="-122"/>
-                <a:cs typeface="Calibri" pitchFamily="34" charset="-120"/>
-              </a:rPr>
-              <a:t>05 — Thuat toan phat hien bat thuong</a:t>
-            </a:r>
-            <a:endParaRPr lang="en-US" sz="900" dirty="0"/>
-          </a:p>
-        </p:txBody>
-      </p:sp>
-      <p:sp>
-        <p:nvSpPr>
           <p:cNvPr id="5" name="Text 3"/>
           <p:cNvSpPr/>
           <p:nvPr/>
@@ -10384,6 +11141,166 @@
               <a:t>= (breaches × 100) / total ≥ 20% → FIRE</a:t>
             </a:r>
             <a:endParaRPr lang="en-US" sz="1000" dirty="0"/>
+          </a:p>
+        </p:txBody>
+      </p:sp>
+      <p:sp>
+        <p:nvSpPr>
+          <p:cNvPr id="32" name="Text 2"/>
+          <p:cNvSpPr/>
+          <p:nvPr/>
+        </p:nvSpPr>
+        <p:spPr>
+          <a:xfrm>
+            <a:off x="548640" y="182880"/>
+            <a:ext cx="4572000" cy="274320"/>
+          </a:xfrm>
+          <a:prstGeom prst="rect">
+            <a:avLst/>
+          </a:prstGeom>
+          <a:noFill/>
+          <a:ln/>
+        </p:spPr>
+        <p:txBody>
+          <a:bodyPr wrap="square" rtlCol="0" anchor="ctr"/>
+          <a:lstStyle/>
+          <a:p>
+            <a:pPr marL="0" indent="0">
+              <a:buNone/>
+            </a:pPr>
+            <a:r>
+              <a:rPr lang="en-US" sz="900" i="1" dirty="0">
+                <a:solidFill>
+                  <a:srgbClr val="94A3B8"/>
+                </a:solidFill>
+                <a:latin typeface="Calibri" pitchFamily="34" charset="0"/>
+                <a:ea typeface="Calibri" pitchFamily="34" charset="-122"/>
+                <a:cs typeface="Calibri" pitchFamily="34" charset="-120"/>
+              </a:rPr>
+              <a:t>05 — </a:t>
+            </a:r>
+            <a:r>
+              <a:rPr lang="en-US" sz="900" i="1" dirty="0" err="1" smtClean="0">
+                <a:solidFill>
+                  <a:srgbClr val="94A3B8"/>
+                </a:solidFill>
+                <a:latin typeface="Calibri" pitchFamily="34" charset="0"/>
+                <a:ea typeface="Calibri" pitchFamily="34" charset="-122"/>
+                <a:cs typeface="Calibri" pitchFamily="34" charset="-120"/>
+              </a:rPr>
+              <a:t>Thuật</a:t>
+            </a:r>
+            <a:r>
+              <a:rPr lang="en-US" sz="900" i="1" dirty="0" smtClean="0">
+                <a:solidFill>
+                  <a:srgbClr val="94A3B8"/>
+                </a:solidFill>
+                <a:latin typeface="Calibri" pitchFamily="34" charset="0"/>
+                <a:ea typeface="Calibri" pitchFamily="34" charset="-122"/>
+                <a:cs typeface="Calibri" pitchFamily="34" charset="-120"/>
+              </a:rPr>
+              <a:t> </a:t>
+            </a:r>
+            <a:r>
+              <a:rPr lang="en-US" sz="900" i="1" dirty="0" err="1" smtClean="0">
+                <a:solidFill>
+                  <a:srgbClr val="94A3B8"/>
+                </a:solidFill>
+                <a:latin typeface="Calibri" pitchFamily="34" charset="0"/>
+                <a:ea typeface="Calibri" pitchFamily="34" charset="-122"/>
+                <a:cs typeface="Calibri" pitchFamily="34" charset="-120"/>
+              </a:rPr>
+              <a:t>toán</a:t>
+            </a:r>
+            <a:r>
+              <a:rPr lang="en-US" sz="900" i="1" dirty="0" smtClean="0">
+                <a:solidFill>
+                  <a:srgbClr val="94A3B8"/>
+                </a:solidFill>
+                <a:latin typeface="Calibri" pitchFamily="34" charset="0"/>
+                <a:ea typeface="Calibri" pitchFamily="34" charset="-122"/>
+                <a:cs typeface="Calibri" pitchFamily="34" charset="-120"/>
+              </a:rPr>
+              <a:t> </a:t>
+            </a:r>
+            <a:r>
+              <a:rPr lang="en-US" sz="900" i="1" dirty="0" err="1" smtClean="0">
+                <a:solidFill>
+                  <a:srgbClr val="94A3B8"/>
+                </a:solidFill>
+                <a:latin typeface="Calibri" pitchFamily="34" charset="0"/>
+                <a:ea typeface="Calibri" pitchFamily="34" charset="-122"/>
+                <a:cs typeface="Calibri" pitchFamily="34" charset="-120"/>
+              </a:rPr>
+              <a:t>phát</a:t>
+            </a:r>
+            <a:r>
+              <a:rPr lang="en-US" sz="900" i="1" dirty="0" smtClean="0">
+                <a:solidFill>
+                  <a:srgbClr val="94A3B8"/>
+                </a:solidFill>
+                <a:latin typeface="Calibri" pitchFamily="34" charset="0"/>
+                <a:ea typeface="Calibri" pitchFamily="34" charset="-122"/>
+                <a:cs typeface="Calibri" pitchFamily="34" charset="-120"/>
+              </a:rPr>
+              <a:t> </a:t>
+            </a:r>
+            <a:r>
+              <a:rPr lang="en-US" sz="900" i="1" dirty="0" err="1" smtClean="0">
+                <a:solidFill>
+                  <a:srgbClr val="94A3B8"/>
+                </a:solidFill>
+                <a:latin typeface="Calibri" pitchFamily="34" charset="0"/>
+                <a:ea typeface="Calibri" pitchFamily="34" charset="-122"/>
+                <a:cs typeface="Calibri" pitchFamily="34" charset="-120"/>
+              </a:rPr>
+              <a:t>hiện</a:t>
+            </a:r>
+            <a:r>
+              <a:rPr lang="en-US" sz="900" i="1" dirty="0" smtClean="0">
+                <a:solidFill>
+                  <a:srgbClr val="94A3B8"/>
+                </a:solidFill>
+                <a:latin typeface="Calibri" pitchFamily="34" charset="0"/>
+                <a:ea typeface="Calibri" pitchFamily="34" charset="-122"/>
+                <a:cs typeface="Calibri" pitchFamily="34" charset="-120"/>
+              </a:rPr>
+              <a:t> </a:t>
+            </a:r>
+            <a:r>
+              <a:rPr lang="en-US" sz="900" i="1" dirty="0" err="1" smtClean="0">
+                <a:solidFill>
+                  <a:srgbClr val="94A3B8"/>
+                </a:solidFill>
+                <a:latin typeface="Calibri" pitchFamily="34" charset="0"/>
+                <a:ea typeface="Calibri" pitchFamily="34" charset="-122"/>
+                <a:cs typeface="Calibri" pitchFamily="34" charset="-120"/>
+              </a:rPr>
+              <a:t>bất</a:t>
+            </a:r>
+            <a:r>
+              <a:rPr lang="en-US" sz="900" i="1" dirty="0" smtClean="0">
+                <a:solidFill>
+                  <a:srgbClr val="94A3B8"/>
+                </a:solidFill>
+                <a:latin typeface="Calibri" pitchFamily="34" charset="0"/>
+                <a:ea typeface="Calibri" pitchFamily="34" charset="-122"/>
+                <a:cs typeface="Calibri" pitchFamily="34" charset="-120"/>
+              </a:rPr>
+              <a:t> </a:t>
+            </a:r>
+            <a:r>
+              <a:rPr lang="en-US" sz="900" i="1" dirty="0" err="1" smtClean="0">
+                <a:solidFill>
+                  <a:srgbClr val="94A3B8"/>
+                </a:solidFill>
+                <a:latin typeface="Calibri" pitchFamily="34" charset="0"/>
+                <a:ea typeface="Calibri" pitchFamily="34" charset="-122"/>
+                <a:cs typeface="Calibri" pitchFamily="34" charset="-120"/>
+              </a:rPr>
+              <a:t>thường</a:t>
+            </a:r>
+            <a:endParaRPr lang="en-US" sz="900" dirty="0"/>
           </a:p>
         </p:txBody>
       </p:sp>
@@ -10481,45 +11398,6 @@
       </p:sp>
       <p:sp>
         <p:nvSpPr>
-          <p:cNvPr id="4" name="Text 2"/>
-          <p:cNvSpPr/>
-          <p:nvPr/>
-        </p:nvSpPr>
-        <p:spPr>
-          <a:xfrm>
-            <a:off x="548640" y="182880"/>
-            <a:ext cx="4572000" cy="274320"/>
-          </a:xfrm>
-          <a:prstGeom prst="rect">
-            <a:avLst/>
-          </a:prstGeom>
-          <a:noFill/>
-          <a:ln/>
-        </p:spPr>
-        <p:txBody>
-          <a:bodyPr wrap="square" rtlCol="0" anchor="ctr"/>
-          <a:lstStyle/>
-          <a:p>
-            <a:pPr marL="0" indent="0">
-              <a:buNone/>
-            </a:pPr>
-            <a:r>
-              <a:rPr lang="en-US" sz="900" i="1" dirty="0">
-                <a:solidFill>
-                  <a:srgbClr val="94A3B8"/>
-                </a:solidFill>
-                <a:latin typeface="Calibri" pitchFamily="34" charset="0"/>
-                <a:ea typeface="Calibri" pitchFamily="34" charset="-122"/>
-                <a:cs typeface="Calibri" pitchFamily="34" charset="-120"/>
-              </a:rPr>
-              <a:t>05 — Thuat toan phat hien bat thuong</a:t>
-            </a:r>
-            <a:endParaRPr lang="en-US" sz="900" dirty="0"/>
-          </a:p>
-        </p:txBody>
-      </p:sp>
-      <p:sp>
-        <p:nvSpPr>
           <p:cNvPr id="6" name="Shape 4"/>
           <p:cNvSpPr/>
           <p:nvPr/>
@@ -11818,6 +12696,166 @@
               <a:t>thường</a:t>
             </a:r>
             <a:endParaRPr lang="en-US" sz="2800" dirty="0"/>
+          </a:p>
+        </p:txBody>
+      </p:sp>
+      <p:sp>
+        <p:nvSpPr>
+          <p:cNvPr id="17" name="Text 2"/>
+          <p:cNvSpPr/>
+          <p:nvPr/>
+        </p:nvSpPr>
+        <p:spPr>
+          <a:xfrm>
+            <a:off x="548640" y="182880"/>
+            <a:ext cx="4572000" cy="274320"/>
+          </a:xfrm>
+          <a:prstGeom prst="rect">
+            <a:avLst/>
+          </a:prstGeom>
+          <a:noFill/>
+          <a:ln/>
+        </p:spPr>
+        <p:txBody>
+          <a:bodyPr wrap="square" rtlCol="0" anchor="ctr"/>
+          <a:lstStyle/>
+          <a:p>
+            <a:pPr marL="0" indent="0">
+              <a:buNone/>
+            </a:pPr>
+            <a:r>
+              <a:rPr lang="en-US" sz="900" i="1" dirty="0">
+                <a:solidFill>
+                  <a:srgbClr val="94A3B8"/>
+                </a:solidFill>
+                <a:latin typeface="Calibri" pitchFamily="34" charset="0"/>
+                <a:ea typeface="Calibri" pitchFamily="34" charset="-122"/>
+                <a:cs typeface="Calibri" pitchFamily="34" charset="-120"/>
+              </a:rPr>
+              <a:t>05 — </a:t>
+            </a:r>
+            <a:r>
+              <a:rPr lang="en-US" sz="900" i="1" dirty="0" err="1" smtClean="0">
+                <a:solidFill>
+                  <a:srgbClr val="94A3B8"/>
+                </a:solidFill>
+                <a:latin typeface="Calibri" pitchFamily="34" charset="0"/>
+                <a:ea typeface="Calibri" pitchFamily="34" charset="-122"/>
+                <a:cs typeface="Calibri" pitchFamily="34" charset="-120"/>
+              </a:rPr>
+              <a:t>Thuật</a:t>
+            </a:r>
+            <a:r>
+              <a:rPr lang="en-US" sz="900" i="1" dirty="0" smtClean="0">
+                <a:solidFill>
+                  <a:srgbClr val="94A3B8"/>
+                </a:solidFill>
+                <a:latin typeface="Calibri" pitchFamily="34" charset="0"/>
+                <a:ea typeface="Calibri" pitchFamily="34" charset="-122"/>
+                <a:cs typeface="Calibri" pitchFamily="34" charset="-120"/>
+              </a:rPr>
+              <a:t> </a:t>
+            </a:r>
+            <a:r>
+              <a:rPr lang="en-US" sz="900" i="1" dirty="0" err="1" smtClean="0">
+                <a:solidFill>
+                  <a:srgbClr val="94A3B8"/>
+                </a:solidFill>
+                <a:latin typeface="Calibri" pitchFamily="34" charset="0"/>
+                <a:ea typeface="Calibri" pitchFamily="34" charset="-122"/>
+                <a:cs typeface="Calibri" pitchFamily="34" charset="-120"/>
+              </a:rPr>
+              <a:t>toán</a:t>
+            </a:r>
+            <a:r>
+              <a:rPr lang="en-US" sz="900" i="1" dirty="0" smtClean="0">
+                <a:solidFill>
+                  <a:srgbClr val="94A3B8"/>
+                </a:solidFill>
+                <a:latin typeface="Calibri" pitchFamily="34" charset="0"/>
+                <a:ea typeface="Calibri" pitchFamily="34" charset="-122"/>
+                <a:cs typeface="Calibri" pitchFamily="34" charset="-120"/>
+              </a:rPr>
+              <a:t> </a:t>
+            </a:r>
+            <a:r>
+              <a:rPr lang="en-US" sz="900" i="1" dirty="0" err="1" smtClean="0">
+                <a:solidFill>
+                  <a:srgbClr val="94A3B8"/>
+                </a:solidFill>
+                <a:latin typeface="Calibri" pitchFamily="34" charset="0"/>
+                <a:ea typeface="Calibri" pitchFamily="34" charset="-122"/>
+                <a:cs typeface="Calibri" pitchFamily="34" charset="-120"/>
+              </a:rPr>
+              <a:t>phát</a:t>
+            </a:r>
+            <a:r>
+              <a:rPr lang="en-US" sz="900" i="1" dirty="0" smtClean="0">
+                <a:solidFill>
+                  <a:srgbClr val="94A3B8"/>
+                </a:solidFill>
+                <a:latin typeface="Calibri" pitchFamily="34" charset="0"/>
+                <a:ea typeface="Calibri" pitchFamily="34" charset="-122"/>
+                <a:cs typeface="Calibri" pitchFamily="34" charset="-120"/>
+              </a:rPr>
+              <a:t> </a:t>
+            </a:r>
+            <a:r>
+              <a:rPr lang="en-US" sz="900" i="1" dirty="0" err="1" smtClean="0">
+                <a:solidFill>
+                  <a:srgbClr val="94A3B8"/>
+                </a:solidFill>
+                <a:latin typeface="Calibri" pitchFamily="34" charset="0"/>
+                <a:ea typeface="Calibri" pitchFamily="34" charset="-122"/>
+                <a:cs typeface="Calibri" pitchFamily="34" charset="-120"/>
+              </a:rPr>
+              <a:t>hiện</a:t>
+            </a:r>
+            <a:r>
+              <a:rPr lang="en-US" sz="900" i="1" dirty="0" smtClean="0">
+                <a:solidFill>
+                  <a:srgbClr val="94A3B8"/>
+                </a:solidFill>
+                <a:latin typeface="Calibri" pitchFamily="34" charset="0"/>
+                <a:ea typeface="Calibri" pitchFamily="34" charset="-122"/>
+                <a:cs typeface="Calibri" pitchFamily="34" charset="-120"/>
+              </a:rPr>
+              <a:t> </a:t>
+            </a:r>
+            <a:r>
+              <a:rPr lang="en-US" sz="900" i="1" dirty="0" err="1" smtClean="0">
+                <a:solidFill>
+                  <a:srgbClr val="94A3B8"/>
+                </a:solidFill>
+                <a:latin typeface="Calibri" pitchFamily="34" charset="0"/>
+                <a:ea typeface="Calibri" pitchFamily="34" charset="-122"/>
+                <a:cs typeface="Calibri" pitchFamily="34" charset="-120"/>
+              </a:rPr>
+              <a:t>bất</a:t>
+            </a:r>
+            <a:r>
+              <a:rPr lang="en-US" sz="900" i="1" dirty="0" smtClean="0">
+                <a:solidFill>
+                  <a:srgbClr val="94A3B8"/>
+                </a:solidFill>
+                <a:latin typeface="Calibri" pitchFamily="34" charset="0"/>
+                <a:ea typeface="Calibri" pitchFamily="34" charset="-122"/>
+                <a:cs typeface="Calibri" pitchFamily="34" charset="-120"/>
+              </a:rPr>
+              <a:t> </a:t>
+            </a:r>
+            <a:r>
+              <a:rPr lang="en-US" sz="900" i="1" dirty="0" err="1" smtClean="0">
+                <a:solidFill>
+                  <a:srgbClr val="94A3B8"/>
+                </a:solidFill>
+                <a:latin typeface="Calibri" pitchFamily="34" charset="0"/>
+                <a:ea typeface="Calibri" pitchFamily="34" charset="-122"/>
+                <a:cs typeface="Calibri" pitchFamily="34" charset="-120"/>
+              </a:rPr>
+              <a:t>thường</a:t>
+            </a:r>
+            <a:endParaRPr lang="en-US" sz="900" dirty="0"/>
           </a:p>
         </p:txBody>
       </p:sp>
@@ -11946,7 +12984,128 @@
                 <a:ea typeface="Calibri" pitchFamily="34" charset="-122"/>
                 <a:cs typeface="Calibri" pitchFamily="34" charset="-120"/>
               </a:rPr>
-              <a:t>05 — Thuat toan phat hien bat thuong</a:t>
+              <a:t>05 — </a:t>
+            </a:r>
+            <a:r>
+              <a:rPr lang="en-US" sz="900" i="1" dirty="0" err="1" smtClean="0">
+                <a:solidFill>
+                  <a:srgbClr val="94A3B8"/>
+                </a:solidFill>
+                <a:latin typeface="Calibri" pitchFamily="34" charset="0"/>
+                <a:ea typeface="Calibri" pitchFamily="34" charset="-122"/>
+                <a:cs typeface="Calibri" pitchFamily="34" charset="-120"/>
+              </a:rPr>
+              <a:t>Thuật</a:t>
+            </a:r>
+            <a:r>
+              <a:rPr lang="en-US" sz="900" i="1" dirty="0" smtClean="0">
+                <a:solidFill>
+                  <a:srgbClr val="94A3B8"/>
+                </a:solidFill>
+                <a:latin typeface="Calibri" pitchFamily="34" charset="0"/>
+                <a:ea typeface="Calibri" pitchFamily="34" charset="-122"/>
+                <a:cs typeface="Calibri" pitchFamily="34" charset="-120"/>
+              </a:rPr>
+              <a:t> </a:t>
+            </a:r>
+            <a:r>
+              <a:rPr lang="en-US" sz="900" i="1" dirty="0" err="1" smtClean="0">
+                <a:solidFill>
+                  <a:srgbClr val="94A3B8"/>
+                </a:solidFill>
+                <a:latin typeface="Calibri" pitchFamily="34" charset="0"/>
+                <a:ea typeface="Calibri" pitchFamily="34" charset="-122"/>
+                <a:cs typeface="Calibri" pitchFamily="34" charset="-120"/>
+              </a:rPr>
+              <a:t>toán</a:t>
+            </a:r>
+            <a:r>
+              <a:rPr lang="en-US" sz="900" i="1" dirty="0" smtClean="0">
+                <a:solidFill>
+                  <a:srgbClr val="94A3B8"/>
+                </a:solidFill>
+                <a:latin typeface="Calibri" pitchFamily="34" charset="0"/>
+                <a:ea typeface="Calibri" pitchFamily="34" charset="-122"/>
+                <a:cs typeface="Calibri" pitchFamily="34" charset="-120"/>
+              </a:rPr>
+              <a:t> </a:t>
+            </a:r>
+            <a:r>
+              <a:rPr lang="en-US" sz="900" i="1" dirty="0" err="1" smtClean="0">
+                <a:solidFill>
+                  <a:srgbClr val="94A3B8"/>
+                </a:solidFill>
+                <a:latin typeface="Calibri" pitchFamily="34" charset="0"/>
+                <a:ea typeface="Calibri" pitchFamily="34" charset="-122"/>
+                <a:cs typeface="Calibri" pitchFamily="34" charset="-120"/>
+              </a:rPr>
+              <a:t>phát</a:t>
+            </a:r>
+            <a:r>
+              <a:rPr lang="en-US" sz="900" i="1" dirty="0" smtClean="0">
+                <a:solidFill>
+                  <a:srgbClr val="94A3B8"/>
+                </a:solidFill>
+                <a:latin typeface="Calibri" pitchFamily="34" charset="0"/>
+                <a:ea typeface="Calibri" pitchFamily="34" charset="-122"/>
+                <a:cs typeface="Calibri" pitchFamily="34" charset="-120"/>
+              </a:rPr>
+              <a:t> </a:t>
+            </a:r>
+            <a:r>
+              <a:rPr lang="en-US" sz="900" i="1" dirty="0" err="1" smtClean="0">
+                <a:solidFill>
+                  <a:srgbClr val="94A3B8"/>
+                </a:solidFill>
+                <a:latin typeface="Calibri" pitchFamily="34" charset="0"/>
+                <a:ea typeface="Calibri" pitchFamily="34" charset="-122"/>
+                <a:cs typeface="Calibri" pitchFamily="34" charset="-120"/>
+              </a:rPr>
+              <a:t>hiện</a:t>
+            </a:r>
+            <a:r>
+              <a:rPr lang="en-US" sz="900" i="1" dirty="0" smtClean="0">
+                <a:solidFill>
+                  <a:srgbClr val="94A3B8"/>
+                </a:solidFill>
+                <a:latin typeface="Calibri" pitchFamily="34" charset="0"/>
+                <a:ea typeface="Calibri" pitchFamily="34" charset="-122"/>
+                <a:cs typeface="Calibri" pitchFamily="34" charset="-120"/>
+              </a:rPr>
+              <a:t> </a:t>
+            </a:r>
+            <a:r>
+              <a:rPr lang="en-US" sz="900" i="1" dirty="0" err="1" smtClean="0">
+                <a:solidFill>
+                  <a:srgbClr val="94A3B8"/>
+                </a:solidFill>
+                <a:latin typeface="Calibri" pitchFamily="34" charset="0"/>
+                <a:ea typeface="Calibri" pitchFamily="34" charset="-122"/>
+                <a:cs typeface="Calibri" pitchFamily="34" charset="-120"/>
+              </a:rPr>
+              <a:t>bất</a:t>
+            </a:r>
+            <a:r>
+              <a:rPr lang="en-US" sz="900" i="1" dirty="0" smtClean="0">
+                <a:solidFill>
+                  <a:srgbClr val="94A3B8"/>
+                </a:solidFill>
+                <a:latin typeface="Calibri" pitchFamily="34" charset="0"/>
+                <a:ea typeface="Calibri" pitchFamily="34" charset="-122"/>
+                <a:cs typeface="Calibri" pitchFamily="34" charset="-120"/>
+              </a:rPr>
+              <a:t> </a:t>
+            </a:r>
+            <a:r>
+              <a:rPr lang="en-US" sz="900" i="1" dirty="0" err="1" smtClean="0">
+                <a:solidFill>
+                  <a:srgbClr val="94A3B8"/>
+                </a:solidFill>
+                <a:latin typeface="Calibri" pitchFamily="34" charset="0"/>
+                <a:ea typeface="Calibri" pitchFamily="34" charset="-122"/>
+                <a:cs typeface="Calibri" pitchFamily="34" charset="-120"/>
+              </a:rPr>
+              <a:t>thường</a:t>
             </a:r>
             <a:endParaRPr lang="en-US" sz="900" dirty="0"/>
           </a:p>
@@ -13416,18 +14575,7 @@
                 <a:ea typeface="Calibri" pitchFamily="34" charset="-122"/>
                 <a:cs typeface="Calibri" pitchFamily="34" charset="-120"/>
               </a:rPr>
-              <a:t> </a:t>
-            </a:r>
-            <a:r>
-              <a:rPr lang="en-US" sz="1100" i="1" dirty="0" smtClean="0">
-                <a:solidFill>
-                  <a:srgbClr val="94A3B8"/>
-                </a:solidFill>
-                <a:latin typeface="Calibri" pitchFamily="34" charset="0"/>
-                <a:ea typeface="Calibri" pitchFamily="34" charset="-122"/>
-                <a:cs typeface="Calibri" pitchFamily="34" charset="-120"/>
-              </a:rPr>
-              <a:t>≥ </a:t>
+              <a:t> ≥ </a:t>
             </a:r>
             <a:r>
               <a:rPr lang="en-US" sz="1100" i="1" dirty="0">
@@ -13756,45 +14904,6 @@
       </p:sp>
       <p:sp>
         <p:nvSpPr>
-          <p:cNvPr id="4" name="Text 2"/>
-          <p:cNvSpPr/>
-          <p:nvPr/>
-        </p:nvSpPr>
-        <p:spPr>
-          <a:xfrm>
-            <a:off x="548640" y="182880"/>
-            <a:ext cx="4572000" cy="274320"/>
-          </a:xfrm>
-          <a:prstGeom prst="rect">
-            <a:avLst/>
-          </a:prstGeom>
-          <a:noFill/>
-          <a:ln/>
-        </p:spPr>
-        <p:txBody>
-          <a:bodyPr wrap="square" rtlCol="0" anchor="ctr"/>
-          <a:lstStyle/>
-          <a:p>
-            <a:pPr marL="0" indent="0">
-              <a:buNone/>
-            </a:pPr>
-            <a:r>
-              <a:rPr lang="en-US" sz="900" i="1" dirty="0">
-                <a:solidFill>
-                  <a:srgbClr val="94A3B8"/>
-                </a:solidFill>
-                <a:latin typeface="Calibri" pitchFamily="34" charset="0"/>
-                <a:ea typeface="Calibri" pitchFamily="34" charset="-122"/>
-                <a:cs typeface="Calibri" pitchFamily="34" charset="-120"/>
-              </a:rPr>
-              <a:t>07 — He thong giam sat</a:t>
-            </a:r>
-            <a:endParaRPr lang="en-US" sz="900" dirty="0"/>
-          </a:p>
-        </p:txBody>
-      </p:sp>
-      <p:sp>
-        <p:nvSpPr>
           <p:cNvPr id="5" name="Text 3"/>
           <p:cNvSpPr/>
           <p:nvPr/>
@@ -13826,18 +14935,7 @@
                 <a:ea typeface="Calibri" pitchFamily="34" charset="-122"/>
                 <a:cs typeface="Calibri" pitchFamily="34" charset="-120"/>
               </a:rPr>
-              <a:t>Monitoring</a:t>
-            </a:r>
-            <a:r>
-              <a:rPr lang="en-US" sz="2800" b="1" dirty="0" smtClean="0">
-                <a:solidFill>
-                  <a:srgbClr val="FFFFFF"/>
-                </a:solidFill>
-                <a:latin typeface="Calibri" pitchFamily="34" charset="0"/>
-                <a:ea typeface="Calibri" pitchFamily="34" charset="-122"/>
-                <a:cs typeface="Calibri" pitchFamily="34" charset="-120"/>
-              </a:rPr>
-              <a:t> </a:t>
+              <a:t>Monitoring </a:t>
             </a:r>
             <a:r>
               <a:rPr lang="en-US" sz="2800" b="1" dirty="0">
@@ -14409,6 +15507,133 @@
           </a:prstGeom>
         </p:spPr>
       </p:pic>
+      <p:sp>
+        <p:nvSpPr>
+          <p:cNvPr id="12" name="Text 2"/>
+          <p:cNvSpPr/>
+          <p:nvPr/>
+        </p:nvSpPr>
+        <p:spPr>
+          <a:xfrm>
+            <a:off x="548640" y="182880"/>
+            <a:ext cx="4572000" cy="274320"/>
+          </a:xfrm>
+          <a:prstGeom prst="rect">
+            <a:avLst/>
+          </a:prstGeom>
+          <a:noFill/>
+          <a:ln/>
+        </p:spPr>
+        <p:txBody>
+          <a:bodyPr wrap="square" rtlCol="0" anchor="ctr"/>
+          <a:lstStyle/>
+          <a:p>
+            <a:pPr marL="0" indent="0">
+              <a:buNone/>
+            </a:pPr>
+            <a:r>
+              <a:rPr lang="en-US" sz="900" i="1" dirty="0" smtClean="0">
+                <a:solidFill>
+                  <a:srgbClr val="94A3B8"/>
+                </a:solidFill>
+                <a:latin typeface="Calibri" pitchFamily="34" charset="0"/>
+                <a:ea typeface="Calibri" pitchFamily="34" charset="-122"/>
+                <a:cs typeface="Calibri" pitchFamily="34" charset="-120"/>
+              </a:rPr>
+              <a:t>06 </a:t>
+            </a:r>
+            <a:r>
+              <a:rPr lang="en-US" sz="900" i="1" dirty="0">
+                <a:solidFill>
+                  <a:srgbClr val="94A3B8"/>
+                </a:solidFill>
+                <a:latin typeface="Calibri" pitchFamily="34" charset="0"/>
+                <a:ea typeface="Calibri" pitchFamily="34" charset="-122"/>
+                <a:cs typeface="Calibri" pitchFamily="34" charset="-120"/>
+              </a:rPr>
+              <a:t>— </a:t>
+            </a:r>
+            <a:r>
+              <a:rPr lang="en-US" sz="900" i="1" dirty="0" err="1" smtClean="0">
+                <a:solidFill>
+                  <a:srgbClr val="94A3B8"/>
+                </a:solidFill>
+                <a:latin typeface="Calibri" pitchFamily="34" charset="0"/>
+                <a:ea typeface="Calibri" pitchFamily="34" charset="-122"/>
+                <a:cs typeface="Calibri" pitchFamily="34" charset="-120"/>
+              </a:rPr>
+              <a:t>Hệ</a:t>
+            </a:r>
+            <a:r>
+              <a:rPr lang="en-US" sz="900" i="1" dirty="0" smtClean="0">
+                <a:solidFill>
+                  <a:srgbClr val="94A3B8"/>
+                </a:solidFill>
+                <a:latin typeface="Calibri" pitchFamily="34" charset="0"/>
+                <a:ea typeface="Calibri" pitchFamily="34" charset="-122"/>
+                <a:cs typeface="Calibri" pitchFamily="34" charset="-120"/>
+              </a:rPr>
+              <a:t> </a:t>
+            </a:r>
+            <a:r>
+              <a:rPr lang="en-US" sz="900" i="1" dirty="0" err="1" smtClean="0">
+                <a:solidFill>
+                  <a:srgbClr val="94A3B8"/>
+                </a:solidFill>
+                <a:latin typeface="Calibri" pitchFamily="34" charset="0"/>
+                <a:ea typeface="Calibri" pitchFamily="34" charset="-122"/>
+                <a:cs typeface="Calibri" pitchFamily="34" charset="-120"/>
+              </a:rPr>
+              <a:t>thống</a:t>
+            </a:r>
+            <a:r>
+              <a:rPr lang="en-US" sz="900" i="1" dirty="0" smtClean="0">
+                <a:solidFill>
+                  <a:srgbClr val="94A3B8"/>
+                </a:solidFill>
+                <a:latin typeface="Calibri" pitchFamily="34" charset="0"/>
+                <a:ea typeface="Calibri" pitchFamily="34" charset="-122"/>
+                <a:cs typeface="Calibri" pitchFamily="34" charset="-120"/>
+              </a:rPr>
+              <a:t> </a:t>
+            </a:r>
+            <a:r>
+              <a:rPr lang="en-US" sz="900" i="1" dirty="0" err="1" smtClean="0">
+                <a:solidFill>
+                  <a:srgbClr val="94A3B8"/>
+                </a:solidFill>
+                <a:latin typeface="Calibri" pitchFamily="34" charset="0"/>
+                <a:ea typeface="Calibri" pitchFamily="34" charset="-122"/>
+                <a:cs typeface="Calibri" pitchFamily="34" charset="-120"/>
+              </a:rPr>
+              <a:t>giám</a:t>
+            </a:r>
+            <a:r>
+              <a:rPr lang="en-US" sz="900" i="1" dirty="0" smtClean="0">
+                <a:solidFill>
+                  <a:srgbClr val="94A3B8"/>
+                </a:solidFill>
+                <a:latin typeface="Calibri" pitchFamily="34" charset="0"/>
+                <a:ea typeface="Calibri" pitchFamily="34" charset="-122"/>
+                <a:cs typeface="Calibri" pitchFamily="34" charset="-120"/>
+              </a:rPr>
+              <a:t> </a:t>
+            </a:r>
+            <a:r>
+              <a:rPr lang="en-US" sz="900" i="1" dirty="0" err="1" smtClean="0">
+                <a:solidFill>
+                  <a:srgbClr val="94A3B8"/>
+                </a:solidFill>
+                <a:latin typeface="Calibri" pitchFamily="34" charset="0"/>
+                <a:ea typeface="Calibri" pitchFamily="34" charset="-122"/>
+                <a:cs typeface="Calibri" pitchFamily="34" charset="-120"/>
+              </a:rPr>
+              <a:t>sát</a:t>
+            </a:r>
+            <a:endParaRPr lang="en-US" sz="900" dirty="0"/>
+          </a:p>
+        </p:txBody>
+      </p:sp>
     </p:spTree>
   </p:cSld>
   <p:clrMapOvr>
@@ -14526,6 +15751,17 @@
               <a:buNone/>
             </a:pPr>
             <a:r>
+              <a:rPr lang="en-US" sz="900" i="1" dirty="0" smtClean="0">
+                <a:solidFill>
+                  <a:srgbClr val="94A3B8"/>
+                </a:solidFill>
+                <a:latin typeface="Calibri" pitchFamily="34" charset="0"/>
+                <a:ea typeface="Calibri" pitchFamily="34" charset="-122"/>
+                <a:cs typeface="Calibri" pitchFamily="34" charset="-120"/>
+              </a:rPr>
+              <a:t>06 </a:t>
+            </a:r>
+            <a:r>
               <a:rPr lang="en-US" sz="900" i="1" dirty="0">
                 <a:solidFill>
                   <a:srgbClr val="94A3B8"/>
@@ -14534,7 +15770,84 @@
                 <a:ea typeface="Calibri" pitchFamily="34" charset="-122"/>
                 <a:cs typeface="Calibri" pitchFamily="34" charset="-120"/>
               </a:rPr>
-              <a:t>07 — He thong giam sat</a:t>
+              <a:t>— </a:t>
+            </a:r>
+            <a:r>
+              <a:rPr lang="en-US" sz="900" i="1" dirty="0" err="1" smtClean="0">
+                <a:solidFill>
+                  <a:srgbClr val="94A3B8"/>
+                </a:solidFill>
+                <a:latin typeface="Calibri" pitchFamily="34" charset="0"/>
+                <a:ea typeface="Calibri" pitchFamily="34" charset="-122"/>
+                <a:cs typeface="Calibri" pitchFamily="34" charset="-120"/>
+              </a:rPr>
+              <a:t>Hệ</a:t>
+            </a:r>
+            <a:r>
+              <a:rPr lang="en-US" sz="900" i="1" dirty="0" smtClean="0">
+                <a:solidFill>
+                  <a:srgbClr val="94A3B8"/>
+                </a:solidFill>
+                <a:latin typeface="Calibri" pitchFamily="34" charset="0"/>
+                <a:ea typeface="Calibri" pitchFamily="34" charset="-122"/>
+                <a:cs typeface="Calibri" pitchFamily="34" charset="-120"/>
+              </a:rPr>
+              <a:t> </a:t>
+            </a:r>
+            <a:r>
+              <a:rPr lang="en-US" sz="900" i="1" dirty="0" err="1" smtClean="0">
+                <a:solidFill>
+                  <a:srgbClr val="94A3B8"/>
+                </a:solidFill>
+                <a:latin typeface="Calibri" pitchFamily="34" charset="0"/>
+                <a:ea typeface="Calibri" pitchFamily="34" charset="-122"/>
+                <a:cs typeface="Calibri" pitchFamily="34" charset="-120"/>
+              </a:rPr>
+              <a:t>thống</a:t>
+            </a:r>
+            <a:r>
+              <a:rPr lang="en-US" sz="900" i="1" dirty="0" smtClean="0">
+                <a:solidFill>
+                  <a:srgbClr val="94A3B8"/>
+                </a:solidFill>
+                <a:latin typeface="Calibri" pitchFamily="34" charset="0"/>
+                <a:ea typeface="Calibri" pitchFamily="34" charset="-122"/>
+                <a:cs typeface="Calibri" pitchFamily="34" charset="-120"/>
+              </a:rPr>
+              <a:t> </a:t>
+            </a:r>
+            <a:r>
+              <a:rPr lang="en-US" sz="900" i="1" dirty="0" err="1" smtClean="0">
+                <a:solidFill>
+                  <a:srgbClr val="94A3B8"/>
+                </a:solidFill>
+                <a:latin typeface="Calibri" pitchFamily="34" charset="0"/>
+                <a:ea typeface="Calibri" pitchFamily="34" charset="-122"/>
+                <a:cs typeface="Calibri" pitchFamily="34" charset="-120"/>
+              </a:rPr>
+              <a:t>giám</a:t>
+            </a:r>
+            <a:r>
+              <a:rPr lang="en-US" sz="900" i="1" dirty="0" smtClean="0">
+                <a:solidFill>
+                  <a:srgbClr val="94A3B8"/>
+                </a:solidFill>
+                <a:latin typeface="Calibri" pitchFamily="34" charset="0"/>
+                <a:ea typeface="Calibri" pitchFamily="34" charset="-122"/>
+                <a:cs typeface="Calibri" pitchFamily="34" charset="-120"/>
+              </a:rPr>
+              <a:t> </a:t>
+            </a:r>
+            <a:r>
+              <a:rPr lang="en-US" sz="900" i="1" dirty="0" err="1" smtClean="0">
+                <a:solidFill>
+                  <a:srgbClr val="94A3B8"/>
+                </a:solidFill>
+                <a:latin typeface="Calibri" pitchFamily="34" charset="0"/>
+                <a:ea typeface="Calibri" pitchFamily="34" charset="-122"/>
+                <a:cs typeface="Calibri" pitchFamily="34" charset="-120"/>
+              </a:rPr>
+              <a:t>sát</a:t>
             </a:r>
             <a:endParaRPr lang="en-US" sz="900" dirty="0"/>
           </a:p>
@@ -14573,18 +15886,7 @@
                 <a:ea typeface="Calibri" pitchFamily="34" charset="-122"/>
                 <a:cs typeface="Calibri" pitchFamily="34" charset="-120"/>
               </a:rPr>
-              <a:t>Monitoring</a:t>
-            </a:r>
-            <a:r>
-              <a:rPr lang="en-US" sz="2800" b="1" dirty="0" smtClean="0">
-                <a:solidFill>
-                  <a:srgbClr val="FFFFFF"/>
-                </a:solidFill>
-                <a:latin typeface="Calibri" pitchFamily="34" charset="0"/>
-                <a:ea typeface="Calibri" pitchFamily="34" charset="-122"/>
-                <a:cs typeface="Calibri" pitchFamily="34" charset="-120"/>
-              </a:rPr>
-              <a:t> </a:t>
+              <a:t>Monitoring </a:t>
             </a:r>
             <a:r>
               <a:rPr lang="en-US" sz="2800" b="1" dirty="0">
@@ -16059,99 +17361,96 @@
           <a:bodyPr wrap="square" rtlCol="0" anchor="ctr"/>
           <a:lstStyle/>
           <a:p>
-            <a:pPr marL="0" indent="0">
-              <a:buNone/>
-            </a:pPr>
-            <a:r>
-              <a:rPr lang="en-US" sz="1500" dirty="0" err="1" smtClean="0">
-                <a:solidFill>
-                  <a:srgbClr val="FFFFFF"/>
-                </a:solidFill>
-                <a:latin typeface="Calibri" pitchFamily="34" charset="0"/>
-                <a:ea typeface="Calibri" pitchFamily="34" charset="-122"/>
-                <a:cs typeface="Calibri" pitchFamily="34" charset="-120"/>
-              </a:rPr>
-              <a:t>Tối</a:t>
-            </a:r>
-            <a:r>
-              <a:rPr lang="en-US" sz="1500" dirty="0" smtClean="0">
-                <a:solidFill>
-                  <a:srgbClr val="FFFFFF"/>
-                </a:solidFill>
-                <a:latin typeface="Calibri" pitchFamily="34" charset="0"/>
-                <a:ea typeface="Calibri" pitchFamily="34" charset="-122"/>
-                <a:cs typeface="Calibri" pitchFamily="34" charset="-120"/>
-              </a:rPr>
-              <a:t> </a:t>
-            </a:r>
-            <a:r>
-              <a:rPr lang="en-US" sz="1500" dirty="0" err="1" smtClean="0">
-                <a:solidFill>
-                  <a:srgbClr val="FFFFFF"/>
-                </a:solidFill>
-                <a:latin typeface="Calibri" pitchFamily="34" charset="0"/>
-                <a:ea typeface="Calibri" pitchFamily="34" charset="-122"/>
-                <a:cs typeface="Calibri" pitchFamily="34" charset="-120"/>
-              </a:rPr>
-              <a:t>ưu</a:t>
-            </a:r>
-            <a:r>
-              <a:rPr lang="en-US" sz="1500" dirty="0" smtClean="0">
-                <a:solidFill>
-                  <a:srgbClr val="FFFFFF"/>
-                </a:solidFill>
-                <a:latin typeface="Calibri" pitchFamily="34" charset="0"/>
-                <a:ea typeface="Calibri" pitchFamily="34" charset="-122"/>
-                <a:cs typeface="Calibri" pitchFamily="34" charset="-120"/>
-              </a:rPr>
-              <a:t> </a:t>
-            </a:r>
-            <a:r>
-              <a:rPr lang="en-US" sz="1500" dirty="0" err="1" smtClean="0">
-                <a:solidFill>
-                  <a:srgbClr val="FFFFFF"/>
-                </a:solidFill>
-                <a:latin typeface="Calibri" pitchFamily="34" charset="0"/>
-                <a:ea typeface="Calibri" pitchFamily="34" charset="-122"/>
-                <a:cs typeface="Calibri" pitchFamily="34" charset="-120"/>
-              </a:rPr>
-              <a:t>hiệu</a:t>
-            </a:r>
-            <a:r>
-              <a:rPr lang="en-US" sz="1500" dirty="0" smtClean="0">
-                <a:solidFill>
-                  <a:srgbClr val="FFFFFF"/>
-                </a:solidFill>
-                <a:latin typeface="Calibri" pitchFamily="34" charset="0"/>
-                <a:ea typeface="Calibri" pitchFamily="34" charset="-122"/>
-                <a:cs typeface="Calibri" pitchFamily="34" charset="-120"/>
-              </a:rPr>
-              <a:t> </a:t>
-            </a:r>
-            <a:r>
-              <a:rPr lang="en-US" sz="1500" dirty="0" err="1" smtClean="0">
-                <a:solidFill>
-                  <a:srgbClr val="FFFFFF"/>
-                </a:solidFill>
-                <a:latin typeface="Calibri" pitchFamily="34" charset="0"/>
-                <a:ea typeface="Calibri" pitchFamily="34" charset="-122"/>
-                <a:cs typeface="Calibri" pitchFamily="34" charset="-120"/>
-              </a:rPr>
-              <a:t>năng</a:t>
-            </a:r>
-            <a:r>
-              <a:rPr lang="en-US" sz="1500" dirty="0" smtClean="0">
-                <a:solidFill>
-                  <a:srgbClr val="FFFFFF"/>
-                </a:solidFill>
-                <a:latin typeface="Calibri" pitchFamily="34" charset="0"/>
-                <a:ea typeface="Calibri" pitchFamily="34" charset="-122"/>
-                <a:cs typeface="Calibri" pitchFamily="34" charset="-120"/>
-              </a:rPr>
-              <a:t> </a:t>
-            </a:r>
-            <a:r>
-              <a:rPr lang="en-US" sz="1500" dirty="0" err="1" smtClean="0">
+            <a:r>
+              <a:rPr lang="en-US" sz="1500" dirty="0" err="1">
+                <a:solidFill>
+                  <a:srgbClr val="FFFFFF"/>
+                </a:solidFill>
+                <a:latin typeface="Calibri" pitchFamily="34" charset="0"/>
+                <a:ea typeface="Calibri" pitchFamily="34" charset="-122"/>
+                <a:cs typeface="Calibri" pitchFamily="34" charset="-120"/>
+              </a:rPr>
+              <a:t>Hệ</a:t>
+            </a:r>
+            <a:r>
+              <a:rPr lang="en-US" sz="1500" dirty="0">
+                <a:solidFill>
+                  <a:srgbClr val="FFFFFF"/>
+                </a:solidFill>
+                <a:latin typeface="Calibri" pitchFamily="34" charset="0"/>
+                <a:ea typeface="Calibri" pitchFamily="34" charset="-122"/>
+                <a:cs typeface="Calibri" pitchFamily="34" charset="-120"/>
+              </a:rPr>
+              <a:t> </a:t>
+            </a:r>
+            <a:r>
+              <a:rPr lang="en-US" sz="1500" dirty="0" err="1">
+                <a:solidFill>
+                  <a:srgbClr val="FFFFFF"/>
+                </a:solidFill>
+                <a:latin typeface="Calibri" pitchFamily="34" charset="0"/>
+                <a:ea typeface="Calibri" pitchFamily="34" charset="-122"/>
+                <a:cs typeface="Calibri" pitchFamily="34" charset="-120"/>
+              </a:rPr>
+              <a:t>thống</a:t>
+            </a:r>
+            <a:r>
+              <a:rPr lang="en-US" sz="1500" dirty="0">
+                <a:solidFill>
+                  <a:srgbClr val="FFFFFF"/>
+                </a:solidFill>
+                <a:latin typeface="Calibri" pitchFamily="34" charset="0"/>
+                <a:ea typeface="Calibri" pitchFamily="34" charset="-122"/>
+                <a:cs typeface="Calibri" pitchFamily="34" charset="-120"/>
+              </a:rPr>
+              <a:t> </a:t>
+            </a:r>
+            <a:r>
+              <a:rPr lang="en-US" sz="1500" dirty="0" err="1">
+                <a:solidFill>
+                  <a:srgbClr val="FFFFFF"/>
+                </a:solidFill>
+                <a:latin typeface="Calibri" pitchFamily="34" charset="0"/>
+                <a:ea typeface="Calibri" pitchFamily="34" charset="-122"/>
+                <a:cs typeface="Calibri" pitchFamily="34" charset="-120"/>
+              </a:rPr>
+              <a:t>giám</a:t>
+            </a:r>
+            <a:r>
+              <a:rPr lang="en-US" sz="1500" dirty="0">
+                <a:solidFill>
+                  <a:srgbClr val="FFFFFF"/>
+                </a:solidFill>
+                <a:latin typeface="Calibri" pitchFamily="34" charset="0"/>
+                <a:ea typeface="Calibri" pitchFamily="34" charset="-122"/>
+                <a:cs typeface="Calibri" pitchFamily="34" charset="-120"/>
+              </a:rPr>
+              <a:t> </a:t>
+            </a:r>
+            <a:r>
+              <a:rPr lang="en-US" sz="1500" dirty="0" err="1">
+                <a:solidFill>
+                  <a:srgbClr val="FFFFFF"/>
+                </a:solidFill>
+                <a:latin typeface="Calibri" pitchFamily="34" charset="0"/>
+                <a:ea typeface="Calibri" pitchFamily="34" charset="-122"/>
+                <a:cs typeface="Calibri" pitchFamily="34" charset="-120"/>
+              </a:rPr>
+              <a:t>sát</a:t>
+            </a:r>
+            <a:r>
+              <a:rPr lang="en-US" sz="1500" dirty="0">
+                <a:solidFill>
+                  <a:srgbClr val="FFFFFF"/>
+                </a:solidFill>
+                <a:latin typeface="Calibri" pitchFamily="34" charset="0"/>
+                <a:ea typeface="Calibri" pitchFamily="34" charset="-122"/>
+                <a:cs typeface="Calibri" pitchFamily="34" charset="-120"/>
+              </a:rPr>
+              <a:t> </a:t>
+            </a:r>
+            <a:r>
+              <a:rPr lang="en-US" sz="1500" dirty="0" err="1">
                 <a:solidFill>
                   <a:srgbClr val="FFFFFF"/>
                 </a:solidFill>
@@ -16162,92 +17461,48 @@
               <a:t>và</a:t>
             </a:r>
             <a:r>
-              <a:rPr lang="en-US" sz="1500" dirty="0" smtClean="0">
-                <a:solidFill>
-                  <a:srgbClr val="FFFFFF"/>
-                </a:solidFill>
-                <a:latin typeface="Calibri" pitchFamily="34" charset="0"/>
-                <a:ea typeface="Calibri" pitchFamily="34" charset="-122"/>
-                <a:cs typeface="Calibri" pitchFamily="34" charset="-120"/>
-              </a:rPr>
-              <a:t> </a:t>
-            </a:r>
-            <a:r>
-              <a:rPr lang="en-US" sz="1500" dirty="0" err="1" smtClean="0">
-                <a:solidFill>
-                  <a:srgbClr val="FFFFFF"/>
-                </a:solidFill>
-                <a:latin typeface="Calibri" pitchFamily="34" charset="0"/>
-                <a:ea typeface="Calibri" pitchFamily="34" charset="-122"/>
-                <a:cs typeface="Calibri" pitchFamily="34" charset="-120"/>
-              </a:rPr>
-              <a:t>khả</a:t>
-            </a:r>
-            <a:r>
-              <a:rPr lang="en-US" sz="1500" dirty="0" smtClean="0">
-                <a:solidFill>
-                  <a:srgbClr val="FFFFFF"/>
-                </a:solidFill>
-                <a:latin typeface="Calibri" pitchFamily="34" charset="0"/>
-                <a:ea typeface="Calibri" pitchFamily="34" charset="-122"/>
-                <a:cs typeface="Calibri" pitchFamily="34" charset="-120"/>
-              </a:rPr>
-              <a:t> </a:t>
-            </a:r>
-            <a:r>
-              <a:rPr lang="en-US" sz="1500" dirty="0" err="1" smtClean="0">
-                <a:solidFill>
-                  <a:srgbClr val="FFFFFF"/>
-                </a:solidFill>
-                <a:latin typeface="Calibri" pitchFamily="34" charset="0"/>
-                <a:ea typeface="Calibri" pitchFamily="34" charset="-122"/>
-                <a:cs typeface="Calibri" pitchFamily="34" charset="-120"/>
-              </a:rPr>
-              <a:t>năng</a:t>
-            </a:r>
-            <a:r>
-              <a:rPr lang="en-US" sz="1500" dirty="0" smtClean="0">
-                <a:solidFill>
-                  <a:srgbClr val="FFFFFF"/>
-                </a:solidFill>
-                <a:latin typeface="Calibri" pitchFamily="34" charset="0"/>
-                <a:ea typeface="Calibri" pitchFamily="34" charset="-122"/>
-                <a:cs typeface="Calibri" pitchFamily="34" charset="-120"/>
-              </a:rPr>
-              <a:t> </a:t>
-            </a:r>
-            <a:r>
-              <a:rPr lang="en-US" sz="1500" dirty="0" err="1" smtClean="0">
-                <a:solidFill>
-                  <a:srgbClr val="FFFFFF"/>
-                </a:solidFill>
-                <a:latin typeface="Calibri" pitchFamily="34" charset="0"/>
-                <a:ea typeface="Calibri" pitchFamily="34" charset="-122"/>
-                <a:cs typeface="Calibri" pitchFamily="34" charset="-120"/>
-              </a:rPr>
-              <a:t>chịu</a:t>
-            </a:r>
-            <a:r>
-              <a:rPr lang="en-US" sz="1500" dirty="0" smtClean="0">
-                <a:solidFill>
-                  <a:srgbClr val="FFFFFF"/>
-                </a:solidFill>
-                <a:latin typeface="Calibri" pitchFamily="34" charset="0"/>
-                <a:ea typeface="Calibri" pitchFamily="34" charset="-122"/>
-                <a:cs typeface="Calibri" pitchFamily="34" charset="-120"/>
-              </a:rPr>
-              <a:t> </a:t>
-            </a:r>
-            <a:r>
-              <a:rPr lang="en-US" sz="1500" dirty="0" err="1" smtClean="0">
-                <a:solidFill>
-                  <a:srgbClr val="FFFFFF"/>
-                </a:solidFill>
-                <a:latin typeface="Calibri" pitchFamily="34" charset="0"/>
-                <a:ea typeface="Calibri" pitchFamily="34" charset="-122"/>
-                <a:cs typeface="Calibri" pitchFamily="34" charset="-120"/>
-              </a:rPr>
-              <a:t>tải</a:t>
+              <a:rPr lang="en-US" sz="1500" dirty="0">
+                <a:solidFill>
+                  <a:srgbClr val="FFFFFF"/>
+                </a:solidFill>
+                <a:latin typeface="Calibri" pitchFamily="34" charset="0"/>
+                <a:ea typeface="Calibri" pitchFamily="34" charset="-122"/>
+                <a:cs typeface="Calibri" pitchFamily="34" charset="-120"/>
+              </a:rPr>
+              <a:t> </a:t>
+            </a:r>
+            <a:r>
+              <a:rPr lang="en-US" sz="1500" dirty="0" err="1">
+                <a:solidFill>
+                  <a:srgbClr val="FFFFFF"/>
+                </a:solidFill>
+                <a:latin typeface="Calibri" pitchFamily="34" charset="0"/>
+                <a:ea typeface="Calibri" pitchFamily="34" charset="-122"/>
+                <a:cs typeface="Calibri" pitchFamily="34" charset="-120"/>
+              </a:rPr>
+              <a:t>quan</a:t>
+            </a:r>
+            <a:r>
+              <a:rPr lang="en-US" sz="1500" dirty="0">
+                <a:solidFill>
+                  <a:srgbClr val="FFFFFF"/>
+                </a:solidFill>
+                <a:latin typeface="Calibri" pitchFamily="34" charset="0"/>
+                <a:ea typeface="Calibri" pitchFamily="34" charset="-122"/>
+                <a:cs typeface="Calibri" pitchFamily="34" charset="-120"/>
+              </a:rPr>
+              <a:t> </a:t>
+            </a:r>
+            <a:r>
+              <a:rPr lang="en-US" sz="1500" dirty="0" err="1">
+                <a:solidFill>
+                  <a:srgbClr val="FFFFFF"/>
+                </a:solidFill>
+                <a:latin typeface="Calibri" pitchFamily="34" charset="0"/>
+                <a:ea typeface="Calibri" pitchFamily="34" charset="-122"/>
+                <a:cs typeface="Calibri" pitchFamily="34" charset="-120"/>
+              </a:rPr>
+              <a:t>sát</a:t>
             </a:r>
             <a:endParaRPr lang="en-US" sz="1500" dirty="0"/>
           </a:p>
@@ -16333,99 +17588,52 @@
           <a:bodyPr wrap="square" rtlCol="0" anchor="ctr"/>
           <a:lstStyle/>
           <a:p>
-            <a:pPr marL="0" indent="0">
-              <a:buNone/>
-            </a:pPr>
-            <a:r>
-              <a:rPr lang="en-US" sz="1500" dirty="0" err="1" smtClean="0">
-                <a:solidFill>
-                  <a:srgbClr val="FFFFFF"/>
-                </a:solidFill>
-                <a:latin typeface="Calibri" pitchFamily="34" charset="0"/>
-                <a:ea typeface="Calibri" pitchFamily="34" charset="-122"/>
-                <a:cs typeface="Calibri" pitchFamily="34" charset="-120"/>
-              </a:rPr>
-              <a:t>Hệ</a:t>
-            </a:r>
-            <a:r>
-              <a:rPr lang="en-US" sz="1500" dirty="0" smtClean="0">
-                <a:solidFill>
-                  <a:srgbClr val="FFFFFF"/>
-                </a:solidFill>
-                <a:latin typeface="Calibri" pitchFamily="34" charset="0"/>
-                <a:ea typeface="Calibri" pitchFamily="34" charset="-122"/>
-                <a:cs typeface="Calibri" pitchFamily="34" charset="-120"/>
-              </a:rPr>
-              <a:t> </a:t>
-            </a:r>
-            <a:r>
-              <a:rPr lang="en-US" sz="1500" dirty="0" err="1" smtClean="0">
-                <a:solidFill>
-                  <a:srgbClr val="FFFFFF"/>
-                </a:solidFill>
-                <a:latin typeface="Calibri" pitchFamily="34" charset="0"/>
-                <a:ea typeface="Calibri" pitchFamily="34" charset="-122"/>
-                <a:cs typeface="Calibri" pitchFamily="34" charset="-120"/>
-              </a:rPr>
-              <a:t>thống</a:t>
-            </a:r>
-            <a:r>
-              <a:rPr lang="en-US" sz="1500" dirty="0" smtClean="0">
-                <a:solidFill>
-                  <a:srgbClr val="FFFFFF"/>
-                </a:solidFill>
-                <a:latin typeface="Calibri" pitchFamily="34" charset="0"/>
-                <a:ea typeface="Calibri" pitchFamily="34" charset="-122"/>
-                <a:cs typeface="Calibri" pitchFamily="34" charset="-120"/>
-              </a:rPr>
-              <a:t> </a:t>
-            </a:r>
-            <a:r>
-              <a:rPr lang="en-US" sz="1500" dirty="0" err="1" smtClean="0">
-                <a:solidFill>
-                  <a:srgbClr val="FFFFFF"/>
-                </a:solidFill>
-                <a:latin typeface="Calibri" pitchFamily="34" charset="0"/>
-                <a:ea typeface="Calibri" pitchFamily="34" charset="-122"/>
-                <a:cs typeface="Calibri" pitchFamily="34" charset="-120"/>
-              </a:rPr>
-              <a:t>giám</a:t>
-            </a:r>
-            <a:r>
-              <a:rPr lang="en-US" sz="1500" dirty="0" smtClean="0">
-                <a:solidFill>
-                  <a:srgbClr val="FFFFFF"/>
-                </a:solidFill>
-                <a:latin typeface="Calibri" pitchFamily="34" charset="0"/>
-                <a:ea typeface="Calibri" pitchFamily="34" charset="-122"/>
-                <a:cs typeface="Calibri" pitchFamily="34" charset="-120"/>
-              </a:rPr>
-              <a:t> </a:t>
-            </a:r>
-            <a:r>
-              <a:rPr lang="en-US" sz="1500" dirty="0" err="1" smtClean="0">
-                <a:solidFill>
-                  <a:srgbClr val="FFFFFF"/>
-                </a:solidFill>
-                <a:latin typeface="Calibri" pitchFamily="34" charset="0"/>
-                <a:ea typeface="Calibri" pitchFamily="34" charset="-122"/>
-                <a:cs typeface="Calibri" pitchFamily="34" charset="-120"/>
-              </a:rPr>
-              <a:t>sát</a:t>
-            </a:r>
-            <a:r>
-              <a:rPr lang="en-US" sz="1500" dirty="0" smtClean="0">
-                <a:solidFill>
-                  <a:srgbClr val="FFFFFF"/>
-                </a:solidFill>
-                <a:latin typeface="Calibri" pitchFamily="34" charset="0"/>
-                <a:ea typeface="Calibri" pitchFamily="34" charset="-122"/>
-                <a:cs typeface="Calibri" pitchFamily="34" charset="-120"/>
-              </a:rPr>
-              <a:t> </a:t>
-            </a:r>
-            <a:r>
-              <a:rPr lang="en-US" sz="1500" dirty="0" err="1" smtClean="0">
+            <a:r>
+              <a:rPr lang="en-US" sz="1500" dirty="0" err="1">
+                <a:solidFill>
+                  <a:srgbClr val="FFFFFF"/>
+                </a:solidFill>
+                <a:latin typeface="Calibri" pitchFamily="34" charset="0"/>
+                <a:ea typeface="Calibri" pitchFamily="34" charset="-122"/>
+                <a:cs typeface="Calibri" pitchFamily="34" charset="-120"/>
+              </a:rPr>
+              <a:t>Kết</a:t>
+            </a:r>
+            <a:r>
+              <a:rPr lang="en-US" sz="1500" dirty="0">
+                <a:solidFill>
+                  <a:srgbClr val="FFFFFF"/>
+                </a:solidFill>
+                <a:latin typeface="Calibri" pitchFamily="34" charset="0"/>
+                <a:ea typeface="Calibri" pitchFamily="34" charset="-122"/>
+                <a:cs typeface="Calibri" pitchFamily="34" charset="-120"/>
+              </a:rPr>
+              <a:t> </a:t>
+            </a:r>
+            <a:r>
+              <a:rPr lang="en-US" sz="1500" dirty="0" err="1">
+                <a:solidFill>
+                  <a:srgbClr val="FFFFFF"/>
+                </a:solidFill>
+                <a:latin typeface="Calibri" pitchFamily="34" charset="0"/>
+                <a:ea typeface="Calibri" pitchFamily="34" charset="-122"/>
+                <a:cs typeface="Calibri" pitchFamily="34" charset="-120"/>
+              </a:rPr>
+              <a:t>luận</a:t>
+            </a:r>
+            <a:r>
+              <a:rPr lang="en-US" sz="1500" dirty="0">
+                <a:solidFill>
+                  <a:srgbClr val="FFFFFF"/>
+                </a:solidFill>
+                <a:latin typeface="Calibri" pitchFamily="34" charset="0"/>
+                <a:ea typeface="Calibri" pitchFamily="34" charset="-122"/>
+                <a:cs typeface="Calibri" pitchFamily="34" charset="-120"/>
+              </a:rPr>
+              <a:t> </a:t>
+            </a:r>
+            <a:r>
+              <a:rPr lang="en-US" sz="1500" dirty="0" err="1">
                 <a:solidFill>
                   <a:srgbClr val="FFFFFF"/>
                 </a:solidFill>
@@ -16436,204 +17644,18 @@
               <a:t>và</a:t>
             </a:r>
             <a:r>
-              <a:rPr lang="en-US" sz="1500" dirty="0" smtClean="0">
-                <a:solidFill>
-                  <a:srgbClr val="FFFFFF"/>
-                </a:solidFill>
-                <a:latin typeface="Calibri" pitchFamily="34" charset="0"/>
-                <a:ea typeface="Calibri" pitchFamily="34" charset="-122"/>
-                <a:cs typeface="Calibri" pitchFamily="34" charset="-120"/>
-              </a:rPr>
-              <a:t> </a:t>
-            </a:r>
-            <a:r>
-              <a:rPr lang="en-US" sz="1500" dirty="0" err="1" smtClean="0">
-                <a:solidFill>
-                  <a:srgbClr val="FFFFFF"/>
-                </a:solidFill>
-                <a:latin typeface="Calibri" pitchFamily="34" charset="0"/>
-                <a:ea typeface="Calibri" pitchFamily="34" charset="-122"/>
-                <a:cs typeface="Calibri" pitchFamily="34" charset="-120"/>
-              </a:rPr>
-              <a:t>quan</a:t>
-            </a:r>
-            <a:r>
-              <a:rPr lang="en-US" sz="1500" dirty="0" smtClean="0">
-                <a:solidFill>
-                  <a:srgbClr val="FFFFFF"/>
-                </a:solidFill>
-                <a:latin typeface="Calibri" pitchFamily="34" charset="0"/>
-                <a:ea typeface="Calibri" pitchFamily="34" charset="-122"/>
-                <a:cs typeface="Calibri" pitchFamily="34" charset="-120"/>
-              </a:rPr>
-              <a:t> </a:t>
-            </a:r>
-            <a:r>
-              <a:rPr lang="en-US" sz="1500" dirty="0" err="1" smtClean="0">
-                <a:solidFill>
-                  <a:srgbClr val="FFFFFF"/>
-                </a:solidFill>
-                <a:latin typeface="Calibri" pitchFamily="34" charset="0"/>
-                <a:ea typeface="Calibri" pitchFamily="34" charset="-122"/>
-                <a:cs typeface="Calibri" pitchFamily="34" charset="-120"/>
-              </a:rPr>
-              <a:t>sát</a:t>
-            </a:r>
-            <a:endParaRPr lang="en-US" sz="1500" dirty="0"/>
-          </a:p>
-        </p:txBody>
-      </p:sp>
-      <p:sp>
-        <p:nvSpPr>
-          <p:cNvPr id="26" name="Shape 24"/>
-          <p:cNvSpPr/>
-          <p:nvPr/>
-        </p:nvSpPr>
-        <p:spPr>
-          <a:xfrm>
-            <a:off x="548640" y="4069080"/>
-            <a:ext cx="502920" cy="320040"/>
-          </a:xfrm>
-          <a:prstGeom prst="rect">
-            <a:avLst/>
-          </a:prstGeom>
-          <a:solidFill>
-            <a:srgbClr val="4CAF50"/>
-          </a:solidFill>
-          <a:ln/>
-        </p:spPr>
-      </p:sp>
-      <p:sp>
-        <p:nvSpPr>
-          <p:cNvPr id="27" name="Text 25"/>
-          <p:cNvSpPr/>
-          <p:nvPr/>
-        </p:nvSpPr>
-        <p:spPr>
-          <a:xfrm>
-            <a:off x="548640" y="4069080"/>
-            <a:ext cx="502920" cy="320040"/>
-          </a:xfrm>
-          <a:prstGeom prst="rect">
-            <a:avLst/>
-          </a:prstGeom>
-          <a:noFill/>
-          <a:ln/>
-        </p:spPr>
-        <p:txBody>
-          <a:bodyPr wrap="square" rtlCol="0" anchor="ctr"/>
-          <a:lstStyle/>
-          <a:p>
-            <a:pPr marL="0" indent="0" algn="ctr">
-              <a:buNone/>
-            </a:pPr>
-            <a:r>
-              <a:rPr lang="en-US" sz="1200" b="1" dirty="0">
-                <a:solidFill>
-                  <a:srgbClr val="FFFFFF"/>
-                </a:solidFill>
-                <a:latin typeface="Calibri" pitchFamily="34" charset="0"/>
-                <a:ea typeface="Calibri" pitchFamily="34" charset="-122"/>
-                <a:cs typeface="Calibri" pitchFamily="34" charset="-120"/>
-              </a:rPr>
-              <a:t>08</a:t>
-            </a:r>
-            <a:endParaRPr lang="en-US" sz="1200" dirty="0"/>
-          </a:p>
-        </p:txBody>
-      </p:sp>
-      <p:sp>
-        <p:nvSpPr>
-          <p:cNvPr id="28" name="Text 26"/>
-          <p:cNvSpPr/>
-          <p:nvPr/>
-        </p:nvSpPr>
-        <p:spPr>
-          <a:xfrm>
-            <a:off x="1234440" y="4069080"/>
-            <a:ext cx="6400800" cy="320040"/>
-          </a:xfrm>
-          <a:prstGeom prst="rect">
-            <a:avLst/>
-          </a:prstGeom>
-          <a:noFill/>
-          <a:ln/>
-        </p:spPr>
-        <p:txBody>
-          <a:bodyPr wrap="square" rtlCol="0" anchor="ctr"/>
-          <a:lstStyle/>
-          <a:p>
-            <a:pPr marL="0" indent="0">
-              <a:buNone/>
-            </a:pPr>
-            <a:r>
-              <a:rPr lang="en-US" sz="1500" dirty="0" err="1" smtClean="0">
-                <a:solidFill>
-                  <a:srgbClr val="FFFFFF"/>
-                </a:solidFill>
-                <a:latin typeface="Calibri" pitchFamily="34" charset="0"/>
-                <a:ea typeface="Calibri" pitchFamily="34" charset="-122"/>
-                <a:cs typeface="Calibri" pitchFamily="34" charset="-120"/>
-              </a:rPr>
-              <a:t>Kết</a:t>
-            </a:r>
-            <a:r>
-              <a:rPr lang="en-US" sz="1500" dirty="0" smtClean="0">
-                <a:solidFill>
-                  <a:srgbClr val="FFFFFF"/>
-                </a:solidFill>
-                <a:latin typeface="Calibri" pitchFamily="34" charset="0"/>
-                <a:ea typeface="Calibri" pitchFamily="34" charset="-122"/>
-                <a:cs typeface="Calibri" pitchFamily="34" charset="-120"/>
-              </a:rPr>
-              <a:t> </a:t>
-            </a:r>
-            <a:r>
-              <a:rPr lang="en-US" sz="1500" dirty="0" err="1" smtClean="0">
-                <a:solidFill>
-                  <a:srgbClr val="FFFFFF"/>
-                </a:solidFill>
-                <a:latin typeface="Calibri" pitchFamily="34" charset="0"/>
-                <a:ea typeface="Calibri" pitchFamily="34" charset="-122"/>
-                <a:cs typeface="Calibri" pitchFamily="34" charset="-120"/>
-              </a:rPr>
-              <a:t>luận</a:t>
-            </a:r>
-            <a:r>
-              <a:rPr lang="en-US" sz="1500" dirty="0" smtClean="0">
-                <a:solidFill>
-                  <a:srgbClr val="FFFFFF"/>
-                </a:solidFill>
-                <a:latin typeface="Calibri" pitchFamily="34" charset="0"/>
-                <a:ea typeface="Calibri" pitchFamily="34" charset="-122"/>
-                <a:cs typeface="Calibri" pitchFamily="34" charset="-120"/>
-              </a:rPr>
-              <a:t> </a:t>
-            </a:r>
-            <a:r>
-              <a:rPr lang="en-US" sz="1500" dirty="0" err="1" smtClean="0">
-                <a:solidFill>
-                  <a:srgbClr val="FFFFFF"/>
-                </a:solidFill>
-                <a:latin typeface="Calibri" pitchFamily="34" charset="0"/>
-                <a:ea typeface="Calibri" pitchFamily="34" charset="-122"/>
-                <a:cs typeface="Calibri" pitchFamily="34" charset="-120"/>
-              </a:rPr>
-              <a:t>và</a:t>
-            </a:r>
-            <a:r>
-              <a:rPr lang="en-US" sz="1500" dirty="0" smtClean="0">
-                <a:solidFill>
-                  <a:srgbClr val="FFFFFF"/>
-                </a:solidFill>
-                <a:latin typeface="Calibri" pitchFamily="34" charset="0"/>
-                <a:ea typeface="Calibri" pitchFamily="34" charset="-122"/>
-                <a:cs typeface="Calibri" pitchFamily="34" charset="-120"/>
-              </a:rPr>
-              <a:t> </a:t>
-            </a:r>
-            <a:r>
-              <a:rPr lang="en-US" sz="1500" dirty="0" err="1" smtClean="0">
+              <a:rPr lang="en-US" sz="1500" dirty="0">
+                <a:solidFill>
+                  <a:srgbClr val="FFFFFF"/>
+                </a:solidFill>
+                <a:latin typeface="Calibri" pitchFamily="34" charset="0"/>
+                <a:ea typeface="Calibri" pitchFamily="34" charset="-122"/>
+                <a:cs typeface="Calibri" pitchFamily="34" charset="-120"/>
+              </a:rPr>
+              <a:t> </a:t>
+            </a:r>
+            <a:r>
+              <a:rPr lang="en-US" sz="1500" dirty="0" err="1">
                 <a:solidFill>
                   <a:srgbClr val="FFFFFF"/>
                 </a:solidFill>
@@ -16644,18 +17666,18 @@
               <a:t>hướng</a:t>
             </a:r>
             <a:r>
-              <a:rPr lang="en-US" sz="1500" dirty="0" smtClean="0">
-                <a:solidFill>
-                  <a:srgbClr val="FFFFFF"/>
-                </a:solidFill>
-                <a:latin typeface="Calibri" pitchFamily="34" charset="0"/>
-                <a:ea typeface="Calibri" pitchFamily="34" charset="-122"/>
-                <a:cs typeface="Calibri" pitchFamily="34" charset="-120"/>
-              </a:rPr>
-              <a:t> </a:t>
-            </a:r>
-            <a:r>
-              <a:rPr lang="en-US" sz="1500" dirty="0" err="1" smtClean="0">
+              <a:rPr lang="en-US" sz="1500" dirty="0">
+                <a:solidFill>
+                  <a:srgbClr val="FFFFFF"/>
+                </a:solidFill>
+                <a:latin typeface="Calibri" pitchFamily="34" charset="0"/>
+                <a:ea typeface="Calibri" pitchFamily="34" charset="-122"/>
+                <a:cs typeface="Calibri" pitchFamily="34" charset="-120"/>
+              </a:rPr>
+              <a:t> </a:t>
+            </a:r>
+            <a:r>
+              <a:rPr lang="en-US" sz="1500" dirty="0" err="1">
                 <a:solidFill>
                   <a:srgbClr val="FFFFFF"/>
                 </a:solidFill>
@@ -16666,18 +17688,18 @@
               <a:t>phát</a:t>
             </a:r>
             <a:r>
-              <a:rPr lang="en-US" sz="1500" dirty="0" smtClean="0">
-                <a:solidFill>
-                  <a:srgbClr val="FFFFFF"/>
-                </a:solidFill>
-                <a:latin typeface="Calibri" pitchFamily="34" charset="0"/>
-                <a:ea typeface="Calibri" pitchFamily="34" charset="-122"/>
-                <a:cs typeface="Calibri" pitchFamily="34" charset="-120"/>
-              </a:rPr>
-              <a:t> </a:t>
-            </a:r>
-            <a:r>
-              <a:rPr lang="en-US" sz="1500" dirty="0" err="1" smtClean="0">
+              <a:rPr lang="en-US" sz="1500" dirty="0">
+                <a:solidFill>
+                  <a:srgbClr val="FFFFFF"/>
+                </a:solidFill>
+                <a:latin typeface="Calibri" pitchFamily="34" charset="0"/>
+                <a:ea typeface="Calibri" pitchFamily="34" charset="-122"/>
+                <a:cs typeface="Calibri" pitchFamily="34" charset="-120"/>
+              </a:rPr>
+              <a:t> </a:t>
+            </a:r>
+            <a:r>
+              <a:rPr lang="en-US" sz="1500" dirty="0" err="1">
                 <a:solidFill>
                   <a:srgbClr val="FFFFFF"/>
                 </a:solidFill>
@@ -17487,18 +18509,7 @@
                 <a:ea typeface="Calibri" pitchFamily="34" charset="-122"/>
                 <a:cs typeface="Calibri" pitchFamily="34" charset="-120"/>
               </a:rPr>
-              <a:t>Monitoring</a:t>
-            </a:r>
-            <a:r>
-              <a:rPr lang="en-US" sz="1100" dirty="0" smtClean="0">
-                <a:solidFill>
-                  <a:srgbClr val="CBD5E1"/>
-                </a:solidFill>
-                <a:latin typeface="Calibri" pitchFamily="34" charset="0"/>
-                <a:ea typeface="Calibri" pitchFamily="34" charset="-122"/>
-                <a:cs typeface="Calibri" pitchFamily="34" charset="-120"/>
-              </a:rPr>
-              <a:t>: </a:t>
+              <a:t>Monitoring: </a:t>
             </a:r>
             <a:r>
               <a:rPr lang="en-US" sz="1100" dirty="0" err="1" smtClean="0">
@@ -17949,18 +18960,7 @@
                 <a:ea typeface="Calibri" pitchFamily="34" charset="-122"/>
                 <a:cs typeface="Calibri" pitchFamily="34" charset="-120"/>
               </a:rPr>
-              <a:t> </a:t>
-            </a:r>
-            <a:r>
-              <a:rPr lang="en-US" sz="1100" dirty="0" smtClean="0">
-                <a:solidFill>
-                  <a:srgbClr val="CBD5E1"/>
-                </a:solidFill>
-                <a:latin typeface="Calibri" pitchFamily="34" charset="0"/>
-                <a:ea typeface="Calibri" pitchFamily="34" charset="-122"/>
-                <a:cs typeface="Calibri" pitchFamily="34" charset="-120"/>
-              </a:rPr>
-              <a:t>Machine </a:t>
+              <a:t> Machine </a:t>
             </a:r>
             <a:r>
               <a:rPr lang="en-US" sz="1100" dirty="0">
@@ -23520,45 +24520,6 @@
       </p:sp>
       <p:sp>
         <p:nvSpPr>
-          <p:cNvPr id="4" name="Text 2"/>
-          <p:cNvSpPr/>
-          <p:nvPr/>
-        </p:nvSpPr>
-        <p:spPr>
-          <a:xfrm>
-            <a:off x="548640" y="182880"/>
-            <a:ext cx="4572000" cy="274320"/>
-          </a:xfrm>
-          <a:prstGeom prst="rect">
-            <a:avLst/>
-          </a:prstGeom>
-          <a:noFill/>
-          <a:ln/>
-        </p:spPr>
-        <p:txBody>
-          <a:bodyPr wrap="square" rtlCol="0" anchor="ctr"/>
-          <a:lstStyle/>
-          <a:p>
-            <a:pPr marL="0" indent="0">
-              <a:buNone/>
-            </a:pPr>
-            <a:r>
-              <a:rPr lang="en-US" sz="900" i="1" dirty="0">
-                <a:solidFill>
-                  <a:srgbClr val="94A3B8"/>
-                </a:solidFill>
-                <a:latin typeface="Calibri" pitchFamily="34" charset="0"/>
-                <a:ea typeface="Calibri" pitchFamily="34" charset="-122"/>
-                <a:cs typeface="Calibri" pitchFamily="34" charset="-120"/>
-              </a:rPr>
-              <a:t>02 — Kien truc tong the</a:t>
-            </a:r>
-            <a:endParaRPr lang="en-US" sz="900" dirty="0"/>
-          </a:p>
-        </p:txBody>
-      </p:sp>
-      <p:sp>
-        <p:nvSpPr>
           <p:cNvPr id="5" name="Text 3"/>
           <p:cNvSpPr/>
           <p:nvPr/>
@@ -23695,6 +24656,122 @@
           </a:ln>
         </p:spPr>
       </p:pic>
+      <p:sp>
+        <p:nvSpPr>
+          <p:cNvPr id="9" name="Text 2"/>
+          <p:cNvSpPr/>
+          <p:nvPr/>
+        </p:nvSpPr>
+        <p:spPr>
+          <a:xfrm>
+            <a:off x="548640" y="182880"/>
+            <a:ext cx="4572000" cy="274320"/>
+          </a:xfrm>
+          <a:prstGeom prst="rect">
+            <a:avLst/>
+          </a:prstGeom>
+          <a:noFill/>
+          <a:ln/>
+        </p:spPr>
+        <p:txBody>
+          <a:bodyPr wrap="square" rtlCol="0" anchor="ctr"/>
+          <a:lstStyle/>
+          <a:p>
+            <a:pPr marL="0" indent="0">
+              <a:buNone/>
+            </a:pPr>
+            <a:r>
+              <a:rPr lang="en-US" sz="900" i="1" dirty="0">
+                <a:solidFill>
+                  <a:srgbClr val="94A3B8"/>
+                </a:solidFill>
+                <a:latin typeface="Calibri" pitchFamily="34" charset="0"/>
+                <a:ea typeface="Calibri" pitchFamily="34" charset="-122"/>
+                <a:cs typeface="Calibri" pitchFamily="34" charset="-120"/>
+              </a:rPr>
+              <a:t>02 — </a:t>
+            </a:r>
+            <a:r>
+              <a:rPr lang="en-US" sz="900" i="1" dirty="0" err="1" smtClean="0">
+                <a:solidFill>
+                  <a:srgbClr val="94A3B8"/>
+                </a:solidFill>
+                <a:latin typeface="Calibri" pitchFamily="34" charset="0"/>
+                <a:ea typeface="Calibri" pitchFamily="34" charset="-122"/>
+                <a:cs typeface="Calibri" pitchFamily="34" charset="-120"/>
+              </a:rPr>
+              <a:t>Kiến</a:t>
+            </a:r>
+            <a:r>
+              <a:rPr lang="en-US" sz="900" i="1" dirty="0" smtClean="0">
+                <a:solidFill>
+                  <a:srgbClr val="94A3B8"/>
+                </a:solidFill>
+                <a:latin typeface="Calibri" pitchFamily="34" charset="0"/>
+                <a:ea typeface="Calibri" pitchFamily="34" charset="-122"/>
+                <a:cs typeface="Calibri" pitchFamily="34" charset="-120"/>
+              </a:rPr>
+              <a:t> </a:t>
+            </a:r>
+            <a:r>
+              <a:rPr lang="en-US" sz="900" i="1" dirty="0" err="1" smtClean="0">
+                <a:solidFill>
+                  <a:srgbClr val="94A3B8"/>
+                </a:solidFill>
+                <a:latin typeface="Calibri" pitchFamily="34" charset="0"/>
+                <a:ea typeface="Calibri" pitchFamily="34" charset="-122"/>
+                <a:cs typeface="Calibri" pitchFamily="34" charset="-120"/>
+              </a:rPr>
+              <a:t>trúc</a:t>
+            </a:r>
+            <a:r>
+              <a:rPr lang="en-US" sz="900" i="1" dirty="0" smtClean="0">
+                <a:solidFill>
+                  <a:srgbClr val="94A3B8"/>
+                </a:solidFill>
+                <a:latin typeface="Calibri" pitchFamily="34" charset="0"/>
+                <a:ea typeface="Calibri" pitchFamily="34" charset="-122"/>
+                <a:cs typeface="Calibri" pitchFamily="34" charset="-120"/>
+              </a:rPr>
+              <a:t> </a:t>
+            </a:r>
+            <a:r>
+              <a:rPr lang="en-US" sz="900" i="1" dirty="0" err="1" smtClean="0">
+                <a:solidFill>
+                  <a:srgbClr val="94A3B8"/>
+                </a:solidFill>
+                <a:latin typeface="Calibri" pitchFamily="34" charset="0"/>
+                <a:ea typeface="Calibri" pitchFamily="34" charset="-122"/>
+                <a:cs typeface="Calibri" pitchFamily="34" charset="-120"/>
+              </a:rPr>
+              <a:t>tổng</a:t>
+            </a:r>
+            <a:r>
+              <a:rPr lang="en-US" sz="900" i="1" dirty="0" smtClean="0">
+                <a:solidFill>
+                  <a:srgbClr val="94A3B8"/>
+                </a:solidFill>
+                <a:latin typeface="Calibri" pitchFamily="34" charset="0"/>
+                <a:ea typeface="Calibri" pitchFamily="34" charset="-122"/>
+                <a:cs typeface="Calibri" pitchFamily="34" charset="-120"/>
+              </a:rPr>
+              <a:t> </a:t>
+            </a:r>
+            <a:r>
+              <a:rPr lang="en-US" sz="900" i="1" dirty="0" err="1" smtClean="0">
+                <a:solidFill>
+                  <a:srgbClr val="94A3B8"/>
+                </a:solidFill>
+                <a:latin typeface="Calibri" pitchFamily="34" charset="0"/>
+                <a:ea typeface="Calibri" pitchFamily="34" charset="-122"/>
+                <a:cs typeface="Calibri" pitchFamily="34" charset="-120"/>
+              </a:rPr>
+              <a:t>thể</a:t>
+            </a:r>
+            <a:endParaRPr lang="en-US" sz="900" dirty="0"/>
+          </a:p>
+        </p:txBody>
+      </p:sp>
     </p:spTree>
   </p:cSld>
   <p:clrMapOvr>
@@ -23820,7 +24897,84 @@
                 <a:ea typeface="Calibri" pitchFamily="34" charset="-122"/>
                 <a:cs typeface="Calibri" pitchFamily="34" charset="-120"/>
               </a:rPr>
-              <a:t>02 — Kien truc tong the</a:t>
+              <a:t>02 — </a:t>
+            </a:r>
+            <a:r>
+              <a:rPr lang="en-US" sz="900" i="1" dirty="0" err="1" smtClean="0">
+                <a:solidFill>
+                  <a:srgbClr val="94A3B8"/>
+                </a:solidFill>
+                <a:latin typeface="Calibri" pitchFamily="34" charset="0"/>
+                <a:ea typeface="Calibri" pitchFamily="34" charset="-122"/>
+                <a:cs typeface="Calibri" pitchFamily="34" charset="-120"/>
+              </a:rPr>
+              <a:t>Kiến</a:t>
+            </a:r>
+            <a:r>
+              <a:rPr lang="en-US" sz="900" i="1" dirty="0" smtClean="0">
+                <a:solidFill>
+                  <a:srgbClr val="94A3B8"/>
+                </a:solidFill>
+                <a:latin typeface="Calibri" pitchFamily="34" charset="0"/>
+                <a:ea typeface="Calibri" pitchFamily="34" charset="-122"/>
+                <a:cs typeface="Calibri" pitchFamily="34" charset="-120"/>
+              </a:rPr>
+              <a:t> </a:t>
+            </a:r>
+            <a:r>
+              <a:rPr lang="en-US" sz="900" i="1" dirty="0" err="1" smtClean="0">
+                <a:solidFill>
+                  <a:srgbClr val="94A3B8"/>
+                </a:solidFill>
+                <a:latin typeface="Calibri" pitchFamily="34" charset="0"/>
+                <a:ea typeface="Calibri" pitchFamily="34" charset="-122"/>
+                <a:cs typeface="Calibri" pitchFamily="34" charset="-120"/>
+              </a:rPr>
+              <a:t>trúc</a:t>
+            </a:r>
+            <a:r>
+              <a:rPr lang="en-US" sz="900" i="1" dirty="0" smtClean="0">
+                <a:solidFill>
+                  <a:srgbClr val="94A3B8"/>
+                </a:solidFill>
+                <a:latin typeface="Calibri" pitchFamily="34" charset="0"/>
+                <a:ea typeface="Calibri" pitchFamily="34" charset="-122"/>
+                <a:cs typeface="Calibri" pitchFamily="34" charset="-120"/>
+              </a:rPr>
+              <a:t> </a:t>
+            </a:r>
+            <a:r>
+              <a:rPr lang="en-US" sz="900" i="1" dirty="0" err="1" smtClean="0">
+                <a:solidFill>
+                  <a:srgbClr val="94A3B8"/>
+                </a:solidFill>
+                <a:latin typeface="Calibri" pitchFamily="34" charset="0"/>
+                <a:ea typeface="Calibri" pitchFamily="34" charset="-122"/>
+                <a:cs typeface="Calibri" pitchFamily="34" charset="-120"/>
+              </a:rPr>
+              <a:t>tổng</a:t>
+            </a:r>
+            <a:r>
+              <a:rPr lang="en-US" sz="900" i="1" dirty="0" smtClean="0">
+                <a:solidFill>
+                  <a:srgbClr val="94A3B8"/>
+                </a:solidFill>
+                <a:latin typeface="Calibri" pitchFamily="34" charset="0"/>
+                <a:ea typeface="Calibri" pitchFamily="34" charset="-122"/>
+                <a:cs typeface="Calibri" pitchFamily="34" charset="-120"/>
+              </a:rPr>
+              <a:t> </a:t>
+            </a:r>
+            <a:r>
+              <a:rPr lang="en-US" sz="900" i="1" dirty="0" err="1" smtClean="0">
+                <a:solidFill>
+                  <a:srgbClr val="94A3B8"/>
+                </a:solidFill>
+                <a:latin typeface="Calibri" pitchFamily="34" charset="0"/>
+                <a:ea typeface="Calibri" pitchFamily="34" charset="-122"/>
+                <a:cs typeface="Calibri" pitchFamily="34" charset="-120"/>
+              </a:rPr>
+              <a:t>thể</a:t>
             </a:r>
             <a:endParaRPr lang="en-US" sz="900" dirty="0"/>
           </a:p>
@@ -26013,45 +27167,6 @@
       </p:sp>
       <p:sp>
         <p:nvSpPr>
-          <p:cNvPr id="4" name="Text 2"/>
-          <p:cNvSpPr/>
-          <p:nvPr/>
-        </p:nvSpPr>
-        <p:spPr>
-          <a:xfrm>
-            <a:off x="548640" y="182880"/>
-            <a:ext cx="4572000" cy="274320"/>
-          </a:xfrm>
-          <a:prstGeom prst="rect">
-            <a:avLst/>
-          </a:prstGeom>
-          <a:noFill/>
-          <a:ln/>
-        </p:spPr>
-        <p:txBody>
-          <a:bodyPr wrap="square" rtlCol="0" anchor="ctr"/>
-          <a:lstStyle/>
-          <a:p>
-            <a:pPr marL="0" indent="0">
-              <a:buNone/>
-            </a:pPr>
-            <a:r>
-              <a:rPr lang="en-US" sz="900" i="1" dirty="0">
-                <a:solidFill>
-                  <a:srgbClr val="94A3B8"/>
-                </a:solidFill>
-                <a:latin typeface="Calibri" pitchFamily="34" charset="0"/>
-                <a:ea typeface="Calibri" pitchFamily="34" charset="-122"/>
-                <a:cs typeface="Calibri" pitchFamily="34" charset="-120"/>
-              </a:rPr>
-              <a:t>03 — Cong nghe su dung</a:t>
-            </a:r>
-            <a:endParaRPr lang="en-US" sz="900" dirty="0"/>
-          </a:p>
-        </p:txBody>
-      </p:sp>
-      <p:sp>
-        <p:nvSpPr>
           <p:cNvPr id="5" name="Text 3"/>
           <p:cNvSpPr/>
           <p:nvPr/>
@@ -27870,6 +28985,122 @@
               <a:t>.</a:t>
             </a:r>
             <a:endParaRPr lang="en-US" sz="1100" dirty="0"/>
+          </a:p>
+        </p:txBody>
+      </p:sp>
+      <p:sp>
+        <p:nvSpPr>
+          <p:cNvPr id="16" name="Text 2"/>
+          <p:cNvSpPr/>
+          <p:nvPr/>
+        </p:nvSpPr>
+        <p:spPr>
+          <a:xfrm>
+            <a:off x="548640" y="182880"/>
+            <a:ext cx="4572000" cy="274320"/>
+          </a:xfrm>
+          <a:prstGeom prst="rect">
+            <a:avLst/>
+          </a:prstGeom>
+          <a:noFill/>
+          <a:ln/>
+        </p:spPr>
+        <p:txBody>
+          <a:bodyPr wrap="square" rtlCol="0" anchor="ctr"/>
+          <a:lstStyle/>
+          <a:p>
+            <a:pPr marL="0" indent="0">
+              <a:buNone/>
+            </a:pPr>
+            <a:r>
+              <a:rPr lang="en-US" sz="900" i="1" dirty="0">
+                <a:solidFill>
+                  <a:srgbClr val="94A3B8"/>
+                </a:solidFill>
+                <a:latin typeface="Calibri" pitchFamily="34" charset="0"/>
+                <a:ea typeface="Calibri" pitchFamily="34" charset="-122"/>
+                <a:cs typeface="Calibri" pitchFamily="34" charset="-120"/>
+              </a:rPr>
+              <a:t>03 — </a:t>
+            </a:r>
+            <a:r>
+              <a:rPr lang="en-US" sz="900" i="1" dirty="0" err="1" smtClean="0">
+                <a:solidFill>
+                  <a:srgbClr val="94A3B8"/>
+                </a:solidFill>
+                <a:latin typeface="Calibri" pitchFamily="34" charset="0"/>
+                <a:ea typeface="Calibri" pitchFamily="34" charset="-122"/>
+                <a:cs typeface="Calibri" pitchFamily="34" charset="-120"/>
+              </a:rPr>
+              <a:t>Công</a:t>
+            </a:r>
+            <a:r>
+              <a:rPr lang="en-US" sz="900" i="1" dirty="0" smtClean="0">
+                <a:solidFill>
+                  <a:srgbClr val="94A3B8"/>
+                </a:solidFill>
+                <a:latin typeface="Calibri" pitchFamily="34" charset="0"/>
+                <a:ea typeface="Calibri" pitchFamily="34" charset="-122"/>
+                <a:cs typeface="Calibri" pitchFamily="34" charset="-120"/>
+              </a:rPr>
+              <a:t> </a:t>
+            </a:r>
+            <a:r>
+              <a:rPr lang="en-US" sz="900" i="1" dirty="0" err="1" smtClean="0">
+                <a:solidFill>
+                  <a:srgbClr val="94A3B8"/>
+                </a:solidFill>
+                <a:latin typeface="Calibri" pitchFamily="34" charset="0"/>
+                <a:ea typeface="Calibri" pitchFamily="34" charset="-122"/>
+                <a:cs typeface="Calibri" pitchFamily="34" charset="-120"/>
+              </a:rPr>
+              <a:t>nghệ</a:t>
+            </a:r>
+            <a:r>
+              <a:rPr lang="en-US" sz="900" i="1" dirty="0" smtClean="0">
+                <a:solidFill>
+                  <a:srgbClr val="94A3B8"/>
+                </a:solidFill>
+                <a:latin typeface="Calibri" pitchFamily="34" charset="0"/>
+                <a:ea typeface="Calibri" pitchFamily="34" charset="-122"/>
+                <a:cs typeface="Calibri" pitchFamily="34" charset="-120"/>
+              </a:rPr>
+              <a:t> </a:t>
+            </a:r>
+            <a:r>
+              <a:rPr lang="en-US" sz="900" i="1" dirty="0" err="1" smtClean="0">
+                <a:solidFill>
+                  <a:srgbClr val="94A3B8"/>
+                </a:solidFill>
+                <a:latin typeface="Calibri" pitchFamily="34" charset="0"/>
+                <a:ea typeface="Calibri" pitchFamily="34" charset="-122"/>
+                <a:cs typeface="Calibri" pitchFamily="34" charset="-120"/>
+              </a:rPr>
+              <a:t>sử</a:t>
+            </a:r>
+            <a:r>
+              <a:rPr lang="en-US" sz="900" i="1" dirty="0" smtClean="0">
+                <a:solidFill>
+                  <a:srgbClr val="94A3B8"/>
+                </a:solidFill>
+                <a:latin typeface="Calibri" pitchFamily="34" charset="0"/>
+                <a:ea typeface="Calibri" pitchFamily="34" charset="-122"/>
+                <a:cs typeface="Calibri" pitchFamily="34" charset="-120"/>
+              </a:rPr>
+              <a:t> </a:t>
+            </a:r>
+            <a:r>
+              <a:rPr lang="en-US" sz="900" i="1" dirty="0" err="1" smtClean="0">
+                <a:solidFill>
+                  <a:srgbClr val="94A3B8"/>
+                </a:solidFill>
+                <a:latin typeface="Calibri" pitchFamily="34" charset="0"/>
+                <a:ea typeface="Calibri" pitchFamily="34" charset="-122"/>
+                <a:cs typeface="Calibri" pitchFamily="34" charset="-120"/>
+              </a:rPr>
+              <a:t>dụng</a:t>
+            </a:r>
+            <a:endParaRPr lang="en-US" sz="900" dirty="0"/>
           </a:p>
         </p:txBody>
       </p:sp>
